--- a/output/wordlabs-typical-3day.pptx
+++ b/output/wordlabs-typical-3day.pptx
@@ -4279,7 +4279,7 @@
                 <a:ea typeface="Calibri" pitchFamily="34" charset="-122"/>
                 <a:cs typeface="Calibri" pitchFamily="34" charset="-120"/>
               </a:rPr>
-              <a:t>Origin: Greek: typos</a:t>
+              <a:t>Origin: Greek: typikos</a:t>
             </a:r>
             <a:endParaRPr lang="en-US" sz="1300" dirty="0"/>
           </a:p>
@@ -6040,7 +6040,7 @@
                 <a:ea typeface="Calibri" pitchFamily="34" charset="-122"/>
                 <a:cs typeface="Calibri" pitchFamily="34" charset="-120"/>
               </a:rPr>
-              <a:t>It was </a:t>
+              <a:t>It is </a:t>
             </a:r>
             <a:pPr algn="l" indent="0" marL="0">
               <a:buNone/>
@@ -6057,7 +6057,7 @@
                 <a:ea typeface="Calibri" pitchFamily="34" charset="-122"/>
                 <a:cs typeface="Calibri" pitchFamily="34" charset="-120"/>
               </a:rPr>
-              <a:t>atypical</a:t>
+              <a:t>typically</a:t>
             </a:r>
             <a:pPr algn="l" indent="0" marL="0">
               <a:buNone/>
@@ -6071,7 +6071,7 @@
                 <a:ea typeface="Calibri" pitchFamily="34" charset="-122"/>
                 <a:cs typeface="Calibri" pitchFamily="34" charset="-120"/>
               </a:rPr>
-              <a:t> weather for summer, but </a:t>
+              <a:t> warm in January, but this </a:t>
             </a:r>
             <a:pPr algn="l" indent="0" marL="0">
               <a:buNone/>
@@ -6088,7 +6088,7 @@
                 <a:ea typeface="Calibri" pitchFamily="34" charset="-122"/>
                 <a:cs typeface="Calibri" pitchFamily="34" charset="-120"/>
               </a:rPr>
-              <a:t>typically</a:t>
+              <a:t>atypical</a:t>
             </a:r>
             <a:pPr algn="l" indent="0" marL="0">
               <a:buNone/>
@@ -6102,7 +6102,7 @@
                 <a:ea typeface="Calibri" pitchFamily="34" charset="-122"/>
                 <a:cs typeface="Calibri" pitchFamily="34" charset="-120"/>
               </a:rPr>
-              <a:t> the class still went outside to play.</a:t>
+              <a:t> cold snap has surprised everyone!</a:t>
             </a:r>
             <a:endParaRPr lang="en-US" sz="1800" dirty="0"/>
           </a:p>
@@ -6257,7 +6257,7 @@
                 <a:ea typeface="Trebuchet MS" pitchFamily="34" charset="-122"/>
                 <a:cs typeface="Trebuchet MS" pitchFamily="34" charset="-120"/>
               </a:rPr>
-              <a:t>atypical</a:t>
+              <a:t>typically</a:t>
             </a:r>
             <a:endParaRPr lang="en-US" sz="1400" dirty="0"/>
           </a:p>
@@ -6385,7 +6385,7 @@
                 <a:ea typeface="Trebuchet MS" pitchFamily="34" charset="-122"/>
                 <a:cs typeface="Trebuchet MS" pitchFamily="34" charset="-120"/>
               </a:rPr>
-              <a:t>typically</a:t>
+              <a:t>atypical</a:t>
             </a:r>
             <a:endParaRPr lang="en-US" sz="1400" dirty="0"/>
           </a:p>
@@ -6855,7 +6855,7 @@
                 <a:ea typeface="Trebuchet MS" pitchFamily="34" charset="-122"/>
                 <a:cs typeface="Trebuchet MS" pitchFamily="34" charset="-120"/>
               </a:rPr>
-              <a:t>atypical</a:t>
+              <a:t>typically</a:t>
             </a:r>
             <a:endParaRPr lang="en-US" sz="2800" dirty="0"/>
           </a:p>
@@ -7682,7 +7682,7 @@
                 <a:ea typeface="Trebuchet MS" pitchFamily="34" charset="-122"/>
                 <a:cs typeface="Trebuchet MS" pitchFamily="34" charset="-120"/>
               </a:rPr>
-              <a:t>atypical</a:t>
+              <a:t>typically</a:t>
             </a:r>
             <a:endParaRPr lang="en-US" sz="2800" dirty="0"/>
           </a:p>
@@ -7771,11 +7771,11 @@
             </a:avLst>
           </a:prstGeom>
           <a:solidFill>
-            <a:srgbClr val="DDD6FE"/>
+            <a:srgbClr val="CCFBF1"/>
           </a:solidFill>
           <a:ln w="19050">
             <a:solidFill>
-              <a:srgbClr val="7C3AED"/>
+              <a:srgbClr val="0D9488"/>
             </a:solidFill>
             <a:prstDash val="solid"/>
           </a:ln>
@@ -7815,13 +7815,13 @@
             <a:r>
               <a:rPr lang="en-US" sz="1300" b="1" dirty="0">
                 <a:solidFill>
-                  <a:srgbClr val="4C1D95"/>
+                  <a:srgbClr val="0F766E"/>
                 </a:solidFill>
                 <a:latin typeface="Trebuchet MS" pitchFamily="34" charset="0"/>
                 <a:ea typeface="Trebuchet MS" pitchFamily="34" charset="-122"/>
                 <a:cs typeface="Trebuchet MS" pitchFamily="34" charset="-120"/>
               </a:rPr>
-              <a:t>a</a:t>
+              <a:t>typical</a:t>
             </a:r>
             <a:endParaRPr lang="en-US" sz="1300" dirty="0"/>
           </a:p>
@@ -7860,7 +7860,7 @@
                 <a:ea typeface="Calibri" pitchFamily="34" charset="-122"/>
                 <a:cs typeface="Calibri" pitchFamily="34" charset="-120"/>
               </a:rPr>
-              <a:t>not, without</a:t>
+              <a:t>representing a type or pattern</a:t>
             </a:r>
             <a:endParaRPr lang="en-US" sz="850" dirty="0"/>
           </a:p>
@@ -7883,11 +7883,11 @@
             </a:avLst>
           </a:prstGeom>
           <a:solidFill>
-            <a:srgbClr val="CCFBF1"/>
+            <a:srgbClr val="FCE7F3"/>
           </a:solidFill>
           <a:ln w="19050">
             <a:solidFill>
-              <a:srgbClr val="0D9488"/>
+              <a:srgbClr val="DB2777"/>
             </a:solidFill>
             <a:prstDash val="solid"/>
           </a:ln>
@@ -7927,13 +7927,13 @@
             <a:r>
               <a:rPr lang="en-US" sz="1300" b="1" dirty="0">
                 <a:solidFill>
-                  <a:srgbClr val="0F766E"/>
+                  <a:srgbClr val="9D174D"/>
                 </a:solidFill>
                 <a:latin typeface="Trebuchet MS" pitchFamily="34" charset="0"/>
                 <a:ea typeface="Trebuchet MS" pitchFamily="34" charset="-122"/>
                 <a:cs typeface="Trebuchet MS" pitchFamily="34" charset="-120"/>
               </a:rPr>
-              <a:t>typical</a:t>
+              <a:t>ly</a:t>
             </a:r>
             <a:endParaRPr lang="en-US" sz="1300" dirty="0"/>
           </a:p>
@@ -7972,7 +7972,7 @@
                 <a:ea typeface="Calibri" pitchFamily="34" charset="-122"/>
                 <a:cs typeface="Calibri" pitchFamily="34" charset="-120"/>
               </a:rPr>
-              <a:t>representing a normal pattern or type</a:t>
+              <a:t>in a certain way (adverb)</a:t>
             </a:r>
             <a:endParaRPr lang="en-US" sz="850" dirty="0"/>
           </a:p>
@@ -8667,7 +8667,7 @@
                 <a:ea typeface="Trebuchet MS" pitchFamily="34" charset="-122"/>
                 <a:cs typeface="Trebuchet MS" pitchFamily="34" charset="-120"/>
               </a:rPr>
-              <a:t>atypical</a:t>
+              <a:t>typically</a:t>
             </a:r>
             <a:endParaRPr lang="en-US" sz="2800" dirty="0"/>
           </a:p>
@@ -8756,11 +8756,11 @@
             </a:avLst>
           </a:prstGeom>
           <a:solidFill>
-            <a:srgbClr val="DDD6FE"/>
+            <a:srgbClr val="CCFBF1"/>
           </a:solidFill>
           <a:ln w="19050">
             <a:solidFill>
-              <a:srgbClr val="7C3AED"/>
+              <a:srgbClr val="0D9488"/>
             </a:solidFill>
             <a:prstDash val="solid"/>
           </a:ln>
@@ -8800,13 +8800,13 @@
             <a:r>
               <a:rPr lang="en-US" sz="1300" b="1" dirty="0">
                 <a:solidFill>
-                  <a:srgbClr val="4C1D95"/>
+                  <a:srgbClr val="0F766E"/>
                 </a:solidFill>
                 <a:latin typeface="Trebuchet MS" pitchFamily="34" charset="0"/>
                 <a:ea typeface="Trebuchet MS" pitchFamily="34" charset="-122"/>
                 <a:cs typeface="Trebuchet MS" pitchFamily="34" charset="-120"/>
               </a:rPr>
-              <a:t>a</a:t>
+              <a:t>typical</a:t>
             </a:r>
             <a:endParaRPr lang="en-US" sz="1300" dirty="0"/>
           </a:p>
@@ -8845,7 +8845,7 @@
                 <a:ea typeface="Calibri" pitchFamily="34" charset="-122"/>
                 <a:cs typeface="Calibri" pitchFamily="34" charset="-120"/>
               </a:rPr>
-              <a:t>not, without</a:t>
+              <a:t>representing a type or pattern</a:t>
             </a:r>
             <a:endParaRPr lang="en-US" sz="850" dirty="0"/>
           </a:p>
@@ -8868,11 +8868,11 @@
             </a:avLst>
           </a:prstGeom>
           <a:solidFill>
-            <a:srgbClr val="CCFBF1"/>
+            <a:srgbClr val="FCE7F3"/>
           </a:solidFill>
           <a:ln w="19050">
             <a:solidFill>
-              <a:srgbClr val="0D9488"/>
+              <a:srgbClr val="DB2777"/>
             </a:solidFill>
             <a:prstDash val="solid"/>
           </a:ln>
@@ -8912,13 +8912,13 @@
             <a:r>
               <a:rPr lang="en-US" sz="1300" b="1" dirty="0">
                 <a:solidFill>
-                  <a:srgbClr val="0F766E"/>
+                  <a:srgbClr val="9D174D"/>
                 </a:solidFill>
                 <a:latin typeface="Trebuchet MS" pitchFamily="34" charset="0"/>
                 <a:ea typeface="Trebuchet MS" pitchFamily="34" charset="-122"/>
                 <a:cs typeface="Trebuchet MS" pitchFamily="34" charset="-120"/>
               </a:rPr>
-              <a:t>typical</a:t>
+              <a:t>ly</a:t>
             </a:r>
             <a:endParaRPr lang="en-US" sz="1300" dirty="0"/>
           </a:p>
@@ -8957,7 +8957,7 @@
                 <a:ea typeface="Calibri" pitchFamily="34" charset="-122"/>
                 <a:cs typeface="Calibri" pitchFamily="34" charset="-120"/>
               </a:rPr>
-              <a:t>representing a normal pattern or type</a:t>
+              <a:t>in a certain way (adverb)</a:t>
             </a:r>
             <a:endParaRPr lang="en-US" sz="850" dirty="0"/>
           </a:p>
@@ -9116,7 +9116,7 @@
                 <a:ea typeface="Trebuchet MS" pitchFamily="34" charset="-122"/>
                 <a:cs typeface="Trebuchet MS" pitchFamily="34" charset="-120"/>
               </a:rPr>
-              <a:t>a</a:t>
+              <a:t>typ</a:t>
             </a:r>
             <a:endParaRPr lang="en-US" sz="1400" dirty="0"/>
           </a:p>
@@ -9221,7 +9221,7 @@
                 <a:ea typeface="Trebuchet MS" pitchFamily="34" charset="-122"/>
                 <a:cs typeface="Trebuchet MS" pitchFamily="34" charset="-120"/>
               </a:rPr>
-              <a:t>typ</a:t>
+              <a:t>i</a:t>
             </a:r>
             <a:endParaRPr lang="en-US" sz="1400" dirty="0"/>
           </a:p>
@@ -9326,7 +9326,7 @@
                 <a:ea typeface="Trebuchet MS" pitchFamily="34" charset="-122"/>
                 <a:cs typeface="Trebuchet MS" pitchFamily="34" charset="-120"/>
               </a:rPr>
-              <a:t>i</a:t>
+              <a:t>cal</a:t>
             </a:r>
             <a:endParaRPr lang="en-US" sz="1400" dirty="0"/>
           </a:p>
@@ -9431,7 +9431,7 @@
                 <a:ea typeface="Trebuchet MS" pitchFamily="34" charset="-122"/>
                 <a:cs typeface="Trebuchet MS" pitchFamily="34" charset="-120"/>
               </a:rPr>
-              <a:t>cal</a:t>
+              <a:t>ly</a:t>
             </a:r>
             <a:endParaRPr lang="en-US" sz="1400" dirty="0"/>
           </a:p>
@@ -9994,7 +9994,7 @@
                 <a:ea typeface="Trebuchet MS" pitchFamily="34" charset="-122"/>
                 <a:cs typeface="Trebuchet MS" pitchFamily="34" charset="-120"/>
               </a:rPr>
-              <a:t>atypical</a:t>
+              <a:t>typically</a:t>
             </a:r>
             <a:endParaRPr lang="en-US" sz="2800" dirty="0"/>
           </a:p>
@@ -10083,11 +10083,11 @@
             </a:avLst>
           </a:prstGeom>
           <a:solidFill>
-            <a:srgbClr val="DDD6FE"/>
+            <a:srgbClr val="CCFBF1"/>
           </a:solidFill>
           <a:ln w="19050">
             <a:solidFill>
-              <a:srgbClr val="7C3AED"/>
+              <a:srgbClr val="0D9488"/>
             </a:solidFill>
             <a:prstDash val="solid"/>
           </a:ln>
@@ -10127,13 +10127,13 @@
             <a:r>
               <a:rPr lang="en-US" sz="1300" b="1" dirty="0">
                 <a:solidFill>
-                  <a:srgbClr val="4C1D95"/>
+                  <a:srgbClr val="0F766E"/>
                 </a:solidFill>
                 <a:latin typeface="Trebuchet MS" pitchFamily="34" charset="0"/>
                 <a:ea typeface="Trebuchet MS" pitchFamily="34" charset="-122"/>
                 <a:cs typeface="Trebuchet MS" pitchFamily="34" charset="-120"/>
               </a:rPr>
-              <a:t>a</a:t>
+              <a:t>typical</a:t>
             </a:r>
             <a:endParaRPr lang="en-US" sz="1300" dirty="0"/>
           </a:p>
@@ -10172,7 +10172,7 @@
                 <a:ea typeface="Calibri" pitchFamily="34" charset="-122"/>
                 <a:cs typeface="Calibri" pitchFamily="34" charset="-120"/>
               </a:rPr>
-              <a:t>not, without</a:t>
+              <a:t>representing a type or pattern</a:t>
             </a:r>
             <a:endParaRPr lang="en-US" sz="850" dirty="0"/>
           </a:p>
@@ -10195,11 +10195,11 @@
             </a:avLst>
           </a:prstGeom>
           <a:solidFill>
-            <a:srgbClr val="CCFBF1"/>
+            <a:srgbClr val="FCE7F3"/>
           </a:solidFill>
           <a:ln w="19050">
             <a:solidFill>
-              <a:srgbClr val="0D9488"/>
+              <a:srgbClr val="DB2777"/>
             </a:solidFill>
             <a:prstDash val="solid"/>
           </a:ln>
@@ -10239,13 +10239,13 @@
             <a:r>
               <a:rPr lang="en-US" sz="1300" b="1" dirty="0">
                 <a:solidFill>
-                  <a:srgbClr val="0F766E"/>
+                  <a:srgbClr val="9D174D"/>
                 </a:solidFill>
                 <a:latin typeface="Trebuchet MS" pitchFamily="34" charset="0"/>
                 <a:ea typeface="Trebuchet MS" pitchFamily="34" charset="-122"/>
                 <a:cs typeface="Trebuchet MS" pitchFamily="34" charset="-120"/>
               </a:rPr>
-              <a:t>typical</a:t>
+              <a:t>ly</a:t>
             </a:r>
             <a:endParaRPr lang="en-US" sz="1300" dirty="0"/>
           </a:p>
@@ -10284,7 +10284,7 @@
                 <a:ea typeface="Calibri" pitchFamily="34" charset="-122"/>
                 <a:cs typeface="Calibri" pitchFamily="34" charset="-120"/>
               </a:rPr>
-              <a:t>representing a normal pattern or type</a:t>
+              <a:t>in a certain way (adverb)</a:t>
             </a:r>
             <a:endParaRPr lang="en-US" sz="850" dirty="0"/>
           </a:p>
@@ -10443,7 +10443,7 @@
                 <a:ea typeface="Trebuchet MS" pitchFamily="34" charset="-122"/>
                 <a:cs typeface="Trebuchet MS" pitchFamily="34" charset="-120"/>
               </a:rPr>
-              <a:t>a</a:t>
+              <a:t>typ</a:t>
             </a:r>
             <a:endParaRPr lang="en-US" sz="1400" dirty="0"/>
           </a:p>
@@ -10548,7 +10548,7 @@
                 <a:ea typeface="Trebuchet MS" pitchFamily="34" charset="-122"/>
                 <a:cs typeface="Trebuchet MS" pitchFamily="34" charset="-120"/>
               </a:rPr>
-              <a:t>typ</a:t>
+              <a:t>i</a:t>
             </a:r>
             <a:endParaRPr lang="en-US" sz="1400" dirty="0"/>
           </a:p>
@@ -10653,7 +10653,7 @@
                 <a:ea typeface="Trebuchet MS" pitchFamily="34" charset="-122"/>
                 <a:cs typeface="Trebuchet MS" pitchFamily="34" charset="-120"/>
               </a:rPr>
-              <a:t>i</a:t>
+              <a:t>cal</a:t>
             </a:r>
             <a:endParaRPr lang="en-US" sz="1400" dirty="0"/>
           </a:p>
@@ -10758,7 +10758,7 @@
                 <a:ea typeface="Trebuchet MS" pitchFamily="34" charset="-122"/>
                 <a:cs typeface="Trebuchet MS" pitchFamily="34" charset="-120"/>
               </a:rPr>
-              <a:t>cal</a:t>
+              <a:t>ly</a:t>
             </a:r>
             <a:endParaRPr lang="en-US" sz="1400" dirty="0"/>
           </a:p>
@@ -10917,7 +10917,7 @@
                 <a:ea typeface="Trebuchet MS" pitchFamily="34" charset="-122"/>
                 <a:cs typeface="Trebuchet MS" pitchFamily="34" charset="-120"/>
               </a:rPr>
-              <a:t>a</a:t>
+              <a:t>t</a:t>
             </a:r>
             <a:endParaRPr lang="en-US" sz="900" dirty="0"/>
           </a:p>
@@ -10983,7 +10983,7 @@
                 <a:ea typeface="Trebuchet MS" pitchFamily="34" charset="-122"/>
                 <a:cs typeface="Trebuchet MS" pitchFamily="34" charset="-120"/>
               </a:rPr>
-              <a:t>t</a:t>
+              <a:t>y</a:t>
             </a:r>
             <a:endParaRPr lang="en-US" sz="900" dirty="0"/>
           </a:p>
@@ -11049,7 +11049,7 @@
                 <a:ea typeface="Trebuchet MS" pitchFamily="34" charset="-122"/>
                 <a:cs typeface="Trebuchet MS" pitchFamily="34" charset="-120"/>
               </a:rPr>
-              <a:t>y</a:t>
+              <a:t>p</a:t>
             </a:r>
             <a:endParaRPr lang="en-US" sz="900" dirty="0"/>
           </a:p>
@@ -11115,7 +11115,7 @@
                 <a:ea typeface="Trebuchet MS" pitchFamily="34" charset="-122"/>
                 <a:cs typeface="Trebuchet MS" pitchFamily="34" charset="-120"/>
               </a:rPr>
-              <a:t>p</a:t>
+              <a:t>i</a:t>
             </a:r>
             <a:endParaRPr lang="en-US" sz="900" dirty="0"/>
           </a:p>
@@ -11181,7 +11181,7 @@
                 <a:ea typeface="Trebuchet MS" pitchFamily="34" charset="-122"/>
                 <a:cs typeface="Trebuchet MS" pitchFamily="34" charset="-120"/>
               </a:rPr>
-              <a:t>i</a:t>
+              <a:t>c</a:t>
             </a:r>
             <a:endParaRPr lang="en-US" sz="900" dirty="0"/>
           </a:p>
@@ -11189,7 +11189,46 @@
       </p:sp>
       <p:sp>
         <p:nvSpPr>
-          <p:cNvPr id="49" name="Shape 47"/>
+          <p:cNvPr id="49" name="Text 47"/>
+          <p:cNvSpPr/>
+          <p:nvPr/>
+        </p:nvSpPr>
+        <p:spPr>
+          <a:xfrm>
+            <a:off x="5254752" y="4572000"/>
+            <a:ext cx="685800" cy="219456"/>
+          </a:xfrm>
+          <a:prstGeom prst="rect">
+            <a:avLst/>
+          </a:prstGeom>
+          <a:noFill/>
+          <a:ln/>
+        </p:spPr>
+        <p:txBody>
+          <a:bodyPr wrap="square" lIns="0" tIns="0" rIns="0" bIns="0" rtlCol="0" anchor="t"/>
+          <a:lstStyle/>
+          <a:p>
+            <a:pPr algn="ctr" indent="0" marL="0">
+              <a:buNone/>
+            </a:pPr>
+            <a:r>
+              <a:rPr lang="en-US" sz="750" i="1" dirty="0">
+                <a:solidFill>
+                  <a:srgbClr val="94A3B8"/>
+                </a:solidFill>
+                <a:latin typeface="Calibri" pitchFamily="34" charset="0"/>
+                <a:ea typeface="Calibri" pitchFamily="34" charset="-122"/>
+                <a:cs typeface="Calibri" pitchFamily="34" charset="-120"/>
+              </a:rPr>
+              <a:t>/k/</a:t>
+            </a:r>
+            <a:endParaRPr lang="en-US" sz="750" dirty="0"/>
+          </a:p>
+        </p:txBody>
+      </p:sp>
+      <p:sp>
+        <p:nvSpPr>
+          <p:cNvPr id="50" name="Shape 48"/>
           <p:cNvSpPr/>
           <p:nvPr/>
         </p:nvSpPr>
@@ -11216,7 +11255,7 @@
       </p:sp>
       <p:sp>
         <p:nvSpPr>
-          <p:cNvPr id="50" name="Text 48"/>
+          <p:cNvPr id="51" name="Text 49"/>
           <p:cNvSpPr/>
           <p:nvPr/>
         </p:nvSpPr>
@@ -11247,48 +11286,9 @@
                 <a:ea typeface="Trebuchet MS" pitchFamily="34" charset="-122"/>
                 <a:cs typeface="Trebuchet MS" pitchFamily="34" charset="-120"/>
               </a:rPr>
-              <a:t>c</a:t>
+              <a:t>a</a:t>
             </a:r>
             <a:endParaRPr lang="en-US" sz="900" dirty="0"/>
-          </a:p>
-        </p:txBody>
-      </p:sp>
-      <p:sp>
-        <p:nvSpPr>
-          <p:cNvPr id="51" name="Text 49"/>
-          <p:cNvSpPr/>
-          <p:nvPr/>
-        </p:nvSpPr>
-        <p:spPr>
-          <a:xfrm>
-            <a:off x="6062472" y="4572000"/>
-            <a:ext cx="685800" cy="219456"/>
-          </a:xfrm>
-          <a:prstGeom prst="rect">
-            <a:avLst/>
-          </a:prstGeom>
-          <a:noFill/>
-          <a:ln/>
-        </p:spPr>
-        <p:txBody>
-          <a:bodyPr wrap="square" lIns="0" tIns="0" rIns="0" bIns="0" rtlCol="0" anchor="t"/>
-          <a:lstStyle/>
-          <a:p>
-            <a:pPr algn="ctr" indent="0" marL="0">
-              <a:buNone/>
-            </a:pPr>
-            <a:r>
-              <a:rPr lang="en-US" sz="750" i="1" dirty="0">
-                <a:solidFill>
-                  <a:srgbClr val="94A3B8"/>
-                </a:solidFill>
-                <a:latin typeface="Calibri" pitchFamily="34" charset="0"/>
-                <a:ea typeface="Calibri" pitchFamily="34" charset="-122"/>
-                <a:cs typeface="Calibri" pitchFamily="34" charset="-120"/>
-              </a:rPr>
-              <a:t>/k/</a:t>
-            </a:r>
-            <a:endParaRPr lang="en-US" sz="750" dirty="0"/>
           </a:p>
         </p:txBody>
       </p:sp>
@@ -11352,7 +11352,7 @@
                 <a:ea typeface="Trebuchet MS" pitchFamily="34" charset="-122"/>
                 <a:cs typeface="Trebuchet MS" pitchFamily="34" charset="-120"/>
               </a:rPr>
-              <a:t>a</a:t>
+              <a:t>ll</a:t>
             </a:r>
             <a:endParaRPr lang="en-US" sz="900" dirty="0"/>
           </a:p>
@@ -11418,7 +11418,7 @@
                 <a:ea typeface="Trebuchet MS" pitchFamily="34" charset="-122"/>
                 <a:cs typeface="Trebuchet MS" pitchFamily="34" charset="-120"/>
               </a:rPr>
-              <a:t>l</a:t>
+              <a:t>y</a:t>
             </a:r>
             <a:endParaRPr lang="en-US" sz="900" dirty="0"/>
           </a:p>
@@ -11849,7 +11849,7 @@
                 <a:ea typeface="Trebuchet MS" pitchFamily="34" charset="-122"/>
                 <a:cs typeface="Trebuchet MS" pitchFamily="34" charset="-120"/>
               </a:rPr>
-              <a:t>typically</a:t>
+              <a:t>atypical</a:t>
             </a:r>
             <a:endParaRPr lang="en-US" sz="2800" dirty="0"/>
           </a:p>
@@ -12676,7 +12676,7 @@
                 <a:ea typeface="Trebuchet MS" pitchFamily="34" charset="-122"/>
                 <a:cs typeface="Trebuchet MS" pitchFamily="34" charset="-120"/>
               </a:rPr>
-              <a:t>typically</a:t>
+              <a:t>atypical</a:t>
             </a:r>
             <a:endParaRPr lang="en-US" sz="2800" dirty="0"/>
           </a:p>
@@ -12765,11 +12765,11 @@
             </a:avLst>
           </a:prstGeom>
           <a:solidFill>
-            <a:srgbClr val="CCFBF1"/>
+            <a:srgbClr val="DDD6FE"/>
           </a:solidFill>
           <a:ln w="19050">
             <a:solidFill>
-              <a:srgbClr val="0D9488"/>
+              <a:srgbClr val="7C3AED"/>
             </a:solidFill>
             <a:prstDash val="solid"/>
           </a:ln>
@@ -12809,13 +12809,13 @@
             <a:r>
               <a:rPr lang="en-US" sz="1300" b="1" dirty="0">
                 <a:solidFill>
-                  <a:srgbClr val="0F766E"/>
+                  <a:srgbClr val="4C1D95"/>
                 </a:solidFill>
                 <a:latin typeface="Trebuchet MS" pitchFamily="34" charset="0"/>
                 <a:ea typeface="Trebuchet MS" pitchFamily="34" charset="-122"/>
                 <a:cs typeface="Trebuchet MS" pitchFamily="34" charset="-120"/>
               </a:rPr>
-              <a:t>typical</a:t>
+              <a:t>a</a:t>
             </a:r>
             <a:endParaRPr lang="en-US" sz="1300" dirty="0"/>
           </a:p>
@@ -12854,7 +12854,7 @@
                 <a:ea typeface="Calibri" pitchFamily="34" charset="-122"/>
                 <a:cs typeface="Calibri" pitchFamily="34" charset="-120"/>
               </a:rPr>
-              <a:t>representing a normal pattern or type</a:t>
+              <a:t>not, without</a:t>
             </a:r>
             <a:endParaRPr lang="en-US" sz="850" dirty="0"/>
           </a:p>
@@ -12877,11 +12877,11 @@
             </a:avLst>
           </a:prstGeom>
           <a:solidFill>
-            <a:srgbClr val="FCE7F3"/>
+            <a:srgbClr val="CCFBF1"/>
           </a:solidFill>
           <a:ln w="19050">
             <a:solidFill>
-              <a:srgbClr val="DB2777"/>
+              <a:srgbClr val="0D9488"/>
             </a:solidFill>
             <a:prstDash val="solid"/>
           </a:ln>
@@ -12921,13 +12921,13 @@
             <a:r>
               <a:rPr lang="en-US" sz="1300" b="1" dirty="0">
                 <a:solidFill>
-                  <a:srgbClr val="9D174D"/>
+                  <a:srgbClr val="0F766E"/>
                 </a:solidFill>
                 <a:latin typeface="Trebuchet MS" pitchFamily="34" charset="0"/>
                 <a:ea typeface="Trebuchet MS" pitchFamily="34" charset="-122"/>
                 <a:cs typeface="Trebuchet MS" pitchFamily="34" charset="-120"/>
               </a:rPr>
-              <a:t>ly</a:t>
+              <a:t>typical</a:t>
             </a:r>
             <a:endParaRPr lang="en-US" sz="1300" dirty="0"/>
           </a:p>
@@ -12966,7 +12966,7 @@
                 <a:ea typeface="Calibri" pitchFamily="34" charset="-122"/>
                 <a:cs typeface="Calibri" pitchFamily="34" charset="-120"/>
               </a:rPr>
-              <a:t>in the manner of</a:t>
+              <a:t>representing a type or pattern</a:t>
             </a:r>
             <a:endParaRPr lang="en-US" sz="850" dirty="0"/>
           </a:p>
@@ -13661,7 +13661,7 @@
                 <a:ea typeface="Trebuchet MS" pitchFamily="34" charset="-122"/>
                 <a:cs typeface="Trebuchet MS" pitchFamily="34" charset="-120"/>
               </a:rPr>
-              <a:t>typically</a:t>
+              <a:t>atypical</a:t>
             </a:r>
             <a:endParaRPr lang="en-US" sz="2800" dirty="0"/>
           </a:p>
@@ -13750,11 +13750,11 @@
             </a:avLst>
           </a:prstGeom>
           <a:solidFill>
-            <a:srgbClr val="CCFBF1"/>
+            <a:srgbClr val="DDD6FE"/>
           </a:solidFill>
           <a:ln w="19050">
             <a:solidFill>
-              <a:srgbClr val="0D9488"/>
+              <a:srgbClr val="7C3AED"/>
             </a:solidFill>
             <a:prstDash val="solid"/>
           </a:ln>
@@ -13794,13 +13794,13 @@
             <a:r>
               <a:rPr lang="en-US" sz="1300" b="1" dirty="0">
                 <a:solidFill>
-                  <a:srgbClr val="0F766E"/>
+                  <a:srgbClr val="4C1D95"/>
                 </a:solidFill>
                 <a:latin typeface="Trebuchet MS" pitchFamily="34" charset="0"/>
                 <a:ea typeface="Trebuchet MS" pitchFamily="34" charset="-122"/>
                 <a:cs typeface="Trebuchet MS" pitchFamily="34" charset="-120"/>
               </a:rPr>
-              <a:t>typical</a:t>
+              <a:t>a</a:t>
             </a:r>
             <a:endParaRPr lang="en-US" sz="1300" dirty="0"/>
           </a:p>
@@ -13839,7 +13839,7 @@
                 <a:ea typeface="Calibri" pitchFamily="34" charset="-122"/>
                 <a:cs typeface="Calibri" pitchFamily="34" charset="-120"/>
               </a:rPr>
-              <a:t>representing a normal pattern or type</a:t>
+              <a:t>not, without</a:t>
             </a:r>
             <a:endParaRPr lang="en-US" sz="850" dirty="0"/>
           </a:p>
@@ -13862,11 +13862,11 @@
             </a:avLst>
           </a:prstGeom>
           <a:solidFill>
-            <a:srgbClr val="FCE7F3"/>
+            <a:srgbClr val="CCFBF1"/>
           </a:solidFill>
           <a:ln w="19050">
             <a:solidFill>
-              <a:srgbClr val="DB2777"/>
+              <a:srgbClr val="0D9488"/>
             </a:solidFill>
             <a:prstDash val="solid"/>
           </a:ln>
@@ -13906,13 +13906,13 @@
             <a:r>
               <a:rPr lang="en-US" sz="1300" b="1" dirty="0">
                 <a:solidFill>
-                  <a:srgbClr val="9D174D"/>
+                  <a:srgbClr val="0F766E"/>
                 </a:solidFill>
                 <a:latin typeface="Trebuchet MS" pitchFamily="34" charset="0"/>
                 <a:ea typeface="Trebuchet MS" pitchFamily="34" charset="-122"/>
                 <a:cs typeface="Trebuchet MS" pitchFamily="34" charset="-120"/>
               </a:rPr>
-              <a:t>ly</a:t>
+              <a:t>typical</a:t>
             </a:r>
             <a:endParaRPr lang="en-US" sz="1300" dirty="0"/>
           </a:p>
@@ -13951,7 +13951,7 @@
                 <a:ea typeface="Calibri" pitchFamily="34" charset="-122"/>
                 <a:cs typeface="Calibri" pitchFamily="34" charset="-120"/>
               </a:rPr>
-              <a:t>in the manner of</a:t>
+              <a:t>representing a type or pattern</a:t>
             </a:r>
             <a:endParaRPr lang="en-US" sz="850" dirty="0"/>
           </a:p>
@@ -14110,7 +14110,7 @@
                 <a:ea typeface="Trebuchet MS" pitchFamily="34" charset="-122"/>
                 <a:cs typeface="Trebuchet MS" pitchFamily="34" charset="-120"/>
               </a:rPr>
-              <a:t>typ</a:t>
+              <a:t>a</a:t>
             </a:r>
             <a:endParaRPr lang="en-US" sz="1400" dirty="0"/>
           </a:p>
@@ -14215,7 +14215,7 @@
                 <a:ea typeface="Trebuchet MS" pitchFamily="34" charset="-122"/>
                 <a:cs typeface="Trebuchet MS" pitchFamily="34" charset="-120"/>
               </a:rPr>
-              <a:t>i</a:t>
+              <a:t>typ</a:t>
             </a:r>
             <a:endParaRPr lang="en-US" sz="1400" dirty="0"/>
           </a:p>
@@ -14320,7 +14320,7 @@
                 <a:ea typeface="Trebuchet MS" pitchFamily="34" charset="-122"/>
                 <a:cs typeface="Trebuchet MS" pitchFamily="34" charset="-120"/>
               </a:rPr>
-              <a:t>cal</a:t>
+              <a:t>i</a:t>
             </a:r>
             <a:endParaRPr lang="en-US" sz="1400" dirty="0"/>
           </a:p>
@@ -14425,7 +14425,7 @@
                 <a:ea typeface="Trebuchet MS" pitchFamily="34" charset="-122"/>
                 <a:cs typeface="Trebuchet MS" pitchFamily="34" charset="-120"/>
               </a:rPr>
-              <a:t>ly</a:t>
+              <a:t>cal</a:t>
             </a:r>
             <a:endParaRPr lang="en-US" sz="1400" dirty="0"/>
           </a:p>
@@ -15253,7 +15253,7 @@
                 <a:ea typeface="Trebuchet MS" pitchFamily="34" charset="-122"/>
                 <a:cs typeface="Trebuchet MS" pitchFamily="34" charset="-120"/>
               </a:rPr>
-              <a:t>typically</a:t>
+              <a:t>atypical</a:t>
             </a:r>
             <a:endParaRPr lang="en-US" sz="2800" dirty="0"/>
           </a:p>
@@ -15342,11 +15342,11 @@
             </a:avLst>
           </a:prstGeom>
           <a:solidFill>
-            <a:srgbClr val="CCFBF1"/>
+            <a:srgbClr val="DDD6FE"/>
           </a:solidFill>
           <a:ln w="19050">
             <a:solidFill>
-              <a:srgbClr val="0D9488"/>
+              <a:srgbClr val="7C3AED"/>
             </a:solidFill>
             <a:prstDash val="solid"/>
           </a:ln>
@@ -15386,13 +15386,13 @@
             <a:r>
               <a:rPr lang="en-US" sz="1300" b="1" dirty="0">
                 <a:solidFill>
-                  <a:srgbClr val="0F766E"/>
+                  <a:srgbClr val="4C1D95"/>
                 </a:solidFill>
                 <a:latin typeface="Trebuchet MS" pitchFamily="34" charset="0"/>
                 <a:ea typeface="Trebuchet MS" pitchFamily="34" charset="-122"/>
                 <a:cs typeface="Trebuchet MS" pitchFamily="34" charset="-120"/>
               </a:rPr>
-              <a:t>typical</a:t>
+              <a:t>a</a:t>
             </a:r>
             <a:endParaRPr lang="en-US" sz="1300" dirty="0"/>
           </a:p>
@@ -15431,7 +15431,7 @@
                 <a:ea typeface="Calibri" pitchFamily="34" charset="-122"/>
                 <a:cs typeface="Calibri" pitchFamily="34" charset="-120"/>
               </a:rPr>
-              <a:t>representing a normal pattern or type</a:t>
+              <a:t>not, without</a:t>
             </a:r>
             <a:endParaRPr lang="en-US" sz="850" dirty="0"/>
           </a:p>
@@ -15454,11 +15454,11 @@
             </a:avLst>
           </a:prstGeom>
           <a:solidFill>
-            <a:srgbClr val="FCE7F3"/>
+            <a:srgbClr val="CCFBF1"/>
           </a:solidFill>
           <a:ln w="19050">
             <a:solidFill>
-              <a:srgbClr val="DB2777"/>
+              <a:srgbClr val="0D9488"/>
             </a:solidFill>
             <a:prstDash val="solid"/>
           </a:ln>
@@ -15498,13 +15498,13 @@
             <a:r>
               <a:rPr lang="en-US" sz="1300" b="1" dirty="0">
                 <a:solidFill>
-                  <a:srgbClr val="9D174D"/>
+                  <a:srgbClr val="0F766E"/>
                 </a:solidFill>
                 <a:latin typeface="Trebuchet MS" pitchFamily="34" charset="0"/>
                 <a:ea typeface="Trebuchet MS" pitchFamily="34" charset="-122"/>
                 <a:cs typeface="Trebuchet MS" pitchFamily="34" charset="-120"/>
               </a:rPr>
-              <a:t>ly</a:t>
+              <a:t>typical</a:t>
             </a:r>
             <a:endParaRPr lang="en-US" sz="1300" dirty="0"/>
           </a:p>
@@ -15543,7 +15543,7 @@
                 <a:ea typeface="Calibri" pitchFamily="34" charset="-122"/>
                 <a:cs typeface="Calibri" pitchFamily="34" charset="-120"/>
               </a:rPr>
-              <a:t>in the manner of</a:t>
+              <a:t>representing a type or pattern</a:t>
             </a:r>
             <a:endParaRPr lang="en-US" sz="850" dirty="0"/>
           </a:p>
@@ -15702,7 +15702,7 @@
                 <a:ea typeface="Trebuchet MS" pitchFamily="34" charset="-122"/>
                 <a:cs typeface="Trebuchet MS" pitchFamily="34" charset="-120"/>
               </a:rPr>
-              <a:t>typ</a:t>
+              <a:t>a</a:t>
             </a:r>
             <a:endParaRPr lang="en-US" sz="1400" dirty="0"/>
           </a:p>
@@ -15807,7 +15807,7 @@
                 <a:ea typeface="Trebuchet MS" pitchFamily="34" charset="-122"/>
                 <a:cs typeface="Trebuchet MS" pitchFamily="34" charset="-120"/>
               </a:rPr>
-              <a:t>i</a:t>
+              <a:t>typ</a:t>
             </a:r>
             <a:endParaRPr lang="en-US" sz="1400" dirty="0"/>
           </a:p>
@@ -15912,7 +15912,7 @@
                 <a:ea typeface="Trebuchet MS" pitchFamily="34" charset="-122"/>
                 <a:cs typeface="Trebuchet MS" pitchFamily="34" charset="-120"/>
               </a:rPr>
-              <a:t>cal</a:t>
+              <a:t>i</a:t>
             </a:r>
             <a:endParaRPr lang="en-US" sz="1400" dirty="0"/>
           </a:p>
@@ -16017,7 +16017,7 @@
                 <a:ea typeface="Trebuchet MS" pitchFamily="34" charset="-122"/>
                 <a:cs typeface="Trebuchet MS" pitchFamily="34" charset="-120"/>
               </a:rPr>
-              <a:t>ly</a:t>
+              <a:t>cal</a:t>
             </a:r>
             <a:endParaRPr lang="en-US" sz="1400" dirty="0"/>
           </a:p>
@@ -16176,7 +16176,7 @@
                 <a:ea typeface="Trebuchet MS" pitchFamily="34" charset="-122"/>
                 <a:cs typeface="Trebuchet MS" pitchFamily="34" charset="-120"/>
               </a:rPr>
-              <a:t>t</a:t>
+              <a:t>a</a:t>
             </a:r>
             <a:endParaRPr lang="en-US" sz="900" dirty="0"/>
           </a:p>
@@ -16242,7 +16242,7 @@
                 <a:ea typeface="Trebuchet MS" pitchFamily="34" charset="-122"/>
                 <a:cs typeface="Trebuchet MS" pitchFamily="34" charset="-120"/>
               </a:rPr>
-              <a:t>y</a:t>
+              <a:t>t</a:t>
             </a:r>
             <a:endParaRPr lang="en-US" sz="900" dirty="0"/>
           </a:p>
@@ -16308,7 +16308,7 @@
                 <a:ea typeface="Trebuchet MS" pitchFamily="34" charset="-122"/>
                 <a:cs typeface="Trebuchet MS" pitchFamily="34" charset="-120"/>
               </a:rPr>
-              <a:t>p</a:t>
+              <a:t>y</a:t>
             </a:r>
             <a:endParaRPr lang="en-US" sz="900" dirty="0"/>
           </a:p>
@@ -16374,7 +16374,7 @@
                 <a:ea typeface="Trebuchet MS" pitchFamily="34" charset="-122"/>
                 <a:cs typeface="Trebuchet MS" pitchFamily="34" charset="-120"/>
               </a:rPr>
-              <a:t>i</a:t>
+              <a:t>p</a:t>
             </a:r>
             <a:endParaRPr lang="en-US" sz="900" dirty="0"/>
           </a:p>
@@ -16440,6 +16440,72 @@
                 <a:ea typeface="Trebuchet MS" pitchFamily="34" charset="-122"/>
                 <a:cs typeface="Trebuchet MS" pitchFamily="34" charset="-120"/>
               </a:rPr>
+              <a:t>i</a:t>
+            </a:r>
+            <a:endParaRPr lang="en-US" sz="900" dirty="0"/>
+          </a:p>
+        </p:txBody>
+      </p:sp>
+      <p:sp>
+        <p:nvSpPr>
+          <p:cNvPr id="49" name="Shape 47"/>
+          <p:cNvSpPr/>
+          <p:nvPr/>
+        </p:nvSpPr>
+        <p:spPr>
+          <a:xfrm>
+            <a:off x="6062472" y="4169664"/>
+            <a:ext cx="685800" cy="384048"/>
+          </a:xfrm>
+          <a:prstGeom prst="rect">
+            <a:avLst>
+              <a:gd name="adj" fmla="val 9524"/>
+            </a:avLst>
+          </a:prstGeom>
+          <a:solidFill>
+            <a:srgbClr val="FFFFFF"/>
+          </a:solidFill>
+          <a:ln w="12700">
+            <a:solidFill>
+              <a:srgbClr val="DB2777"/>
+            </a:solidFill>
+            <a:prstDash val="solid"/>
+          </a:ln>
+        </p:spPr>
+      </p:sp>
+      <p:sp>
+        <p:nvSpPr>
+          <p:cNvPr id="50" name="Text 48"/>
+          <p:cNvSpPr/>
+          <p:nvPr/>
+        </p:nvSpPr>
+        <p:spPr>
+          <a:xfrm>
+            <a:off x="6062472" y="4169664"/>
+            <a:ext cx="685800" cy="384048"/>
+          </a:xfrm>
+          <a:prstGeom prst="rect">
+            <a:avLst/>
+          </a:prstGeom>
+          <a:noFill/>
+          <a:ln/>
+        </p:spPr>
+        <p:txBody>
+          <a:bodyPr wrap="square" lIns="0" tIns="0" rIns="0" bIns="0" rtlCol="0" anchor="ctr"/>
+          <a:lstStyle/>
+          <a:p>
+            <a:pPr algn="ctr" indent="0" marL="0">
+              <a:buNone/>
+            </a:pPr>
+            <a:r>
+              <a:rPr lang="en-US" sz="900" b="1" dirty="0">
+                <a:solidFill>
+                  <a:srgbClr val="9D174D"/>
+                </a:solidFill>
+                <a:latin typeface="Trebuchet MS" pitchFamily="34" charset="0"/>
+                <a:ea typeface="Trebuchet MS" pitchFamily="34" charset="-122"/>
+                <a:cs typeface="Trebuchet MS" pitchFamily="34" charset="-120"/>
+              </a:rPr>
               <a:t>c</a:t>
             </a:r>
             <a:endParaRPr lang="en-US" sz="900" dirty="0"/>
@@ -16448,13 +16514,13 @@
       </p:sp>
       <p:sp>
         <p:nvSpPr>
-          <p:cNvPr id="49" name="Text 47"/>
-          <p:cNvSpPr/>
-          <p:nvPr/>
-        </p:nvSpPr>
-        <p:spPr>
-          <a:xfrm>
-            <a:off x="5254752" y="4572000"/>
+          <p:cNvPr id="51" name="Text 49"/>
+          <p:cNvSpPr/>
+          <p:nvPr/>
+        </p:nvSpPr>
+        <p:spPr>
+          <a:xfrm>
+            <a:off x="6062472" y="4572000"/>
             <a:ext cx="685800" cy="219456"/>
           </a:xfrm>
           <a:prstGeom prst="rect">
@@ -16487,13 +16553,13 @@
       </p:sp>
       <p:sp>
         <p:nvSpPr>
-          <p:cNvPr id="50" name="Shape 48"/>
-          <p:cNvSpPr/>
-          <p:nvPr/>
-        </p:nvSpPr>
-        <p:spPr>
-          <a:xfrm>
-            <a:off x="6062472" y="4169664"/>
+          <p:cNvPr id="52" name="Shape 50"/>
+          <p:cNvSpPr/>
+          <p:nvPr/>
+        </p:nvSpPr>
+        <p:spPr>
+          <a:xfrm>
+            <a:off x="6870192" y="4169664"/>
             <a:ext cx="685800" cy="384048"/>
           </a:xfrm>
           <a:prstGeom prst="rect">
@@ -16514,13 +16580,13 @@
       </p:sp>
       <p:sp>
         <p:nvSpPr>
-          <p:cNvPr id="51" name="Text 49"/>
-          <p:cNvSpPr/>
-          <p:nvPr/>
-        </p:nvSpPr>
-        <p:spPr>
-          <a:xfrm>
-            <a:off x="6062472" y="4169664"/>
+          <p:cNvPr id="53" name="Text 51"/>
+          <p:cNvSpPr/>
+          <p:nvPr/>
+        </p:nvSpPr>
+        <p:spPr>
+          <a:xfrm>
+            <a:off x="6870192" y="4169664"/>
             <a:ext cx="685800" cy="384048"/>
           </a:xfrm>
           <a:prstGeom prst="rect">
@@ -16553,13 +16619,13 @@
       </p:sp>
       <p:sp>
         <p:nvSpPr>
-          <p:cNvPr id="52" name="Shape 50"/>
-          <p:cNvSpPr/>
-          <p:nvPr/>
-        </p:nvSpPr>
-        <p:spPr>
-          <a:xfrm>
-            <a:off x="6870192" y="4169664"/>
+          <p:cNvPr id="54" name="Shape 52"/>
+          <p:cNvSpPr/>
+          <p:nvPr/>
+        </p:nvSpPr>
+        <p:spPr>
+          <a:xfrm>
+            <a:off x="7677912" y="4169664"/>
             <a:ext cx="685800" cy="384048"/>
           </a:xfrm>
           <a:prstGeom prst="rect">
@@ -16580,13 +16646,13 @@
       </p:sp>
       <p:sp>
         <p:nvSpPr>
-          <p:cNvPr id="53" name="Text 51"/>
-          <p:cNvSpPr/>
-          <p:nvPr/>
-        </p:nvSpPr>
-        <p:spPr>
-          <a:xfrm>
-            <a:off x="6870192" y="4169664"/>
+          <p:cNvPr id="55" name="Text 53"/>
+          <p:cNvSpPr/>
+          <p:nvPr/>
+        </p:nvSpPr>
+        <p:spPr>
+          <a:xfrm>
+            <a:off x="7677912" y="4169664"/>
             <a:ext cx="685800" cy="384048"/>
           </a:xfrm>
           <a:prstGeom prst="rect">
@@ -16611,73 +16677,7 @@
                 <a:ea typeface="Trebuchet MS" pitchFamily="34" charset="-122"/>
                 <a:cs typeface="Trebuchet MS" pitchFamily="34" charset="-120"/>
               </a:rPr>
-              <a:t>ll</a:t>
-            </a:r>
-            <a:endParaRPr lang="en-US" sz="900" dirty="0"/>
-          </a:p>
-        </p:txBody>
-      </p:sp>
-      <p:sp>
-        <p:nvSpPr>
-          <p:cNvPr id="54" name="Shape 52"/>
-          <p:cNvSpPr/>
-          <p:nvPr/>
-        </p:nvSpPr>
-        <p:spPr>
-          <a:xfrm>
-            <a:off x="7677912" y="4169664"/>
-            <a:ext cx="685800" cy="384048"/>
-          </a:xfrm>
-          <a:prstGeom prst="rect">
-            <a:avLst>
-              <a:gd name="adj" fmla="val 9524"/>
-            </a:avLst>
-          </a:prstGeom>
-          <a:solidFill>
-            <a:srgbClr val="FFFFFF"/>
-          </a:solidFill>
-          <a:ln w="12700">
-            <a:solidFill>
-              <a:srgbClr val="DB2777"/>
-            </a:solidFill>
-            <a:prstDash val="solid"/>
-          </a:ln>
-        </p:spPr>
-      </p:sp>
-      <p:sp>
-        <p:nvSpPr>
-          <p:cNvPr id="55" name="Text 53"/>
-          <p:cNvSpPr/>
-          <p:nvPr/>
-        </p:nvSpPr>
-        <p:spPr>
-          <a:xfrm>
-            <a:off x="7677912" y="4169664"/>
-            <a:ext cx="685800" cy="384048"/>
-          </a:xfrm>
-          <a:prstGeom prst="rect">
-            <a:avLst/>
-          </a:prstGeom>
-          <a:noFill/>
-          <a:ln/>
-        </p:spPr>
-        <p:txBody>
-          <a:bodyPr wrap="square" lIns="0" tIns="0" rIns="0" bIns="0" rtlCol="0" anchor="ctr"/>
-          <a:lstStyle/>
-          <a:p>
-            <a:pPr algn="ctr" indent="0" marL="0">
-              <a:buNone/>
-            </a:pPr>
-            <a:r>
-              <a:rPr lang="en-US" sz="900" b="1" dirty="0">
-                <a:solidFill>
-                  <a:srgbClr val="9D174D"/>
-                </a:solidFill>
-                <a:latin typeface="Trebuchet MS" pitchFamily="34" charset="0"/>
-                <a:ea typeface="Trebuchet MS" pitchFamily="34" charset="-122"/>
-                <a:cs typeface="Trebuchet MS" pitchFamily="34" charset="-120"/>
-              </a:rPr>
-              <a:t>y</a:t>
+              <a:t>l</a:t>
             </a:r>
             <a:endParaRPr lang="en-US" sz="900" dirty="0"/>
           </a:p>
@@ -18020,7 +18020,7 @@
                 <a:ea typeface="Calibri" pitchFamily="34" charset="-122"/>
                 <a:cs typeface="Calibri" pitchFamily="34" charset="-120"/>
               </a:rPr>
-              <a:t>, the storm arrived in spring; however, it was </a:t>
+              <a:t>, the students were </a:t>
             </a:r>
             <a:pPr algn="l" indent="0" marL="0">
               <a:buNone/>
@@ -18037,7 +18037,7 @@
                 <a:ea typeface="Calibri" pitchFamily="34" charset="-122"/>
                 <a:cs typeface="Calibri" pitchFamily="34" charset="-120"/>
               </a:rPr>
-              <a:t>typically</a:t>
+              <a:t>untypically</a:t>
             </a:r>
             <a:pPr algn="l" indent="0" marL="0">
               <a:buNone/>
@@ -18051,7 +18051,7 @@
                 <a:ea typeface="Calibri" pitchFamily="34" charset="-122"/>
                 <a:cs typeface="Calibri" pitchFamily="34" charset="-120"/>
               </a:rPr>
-              <a:t> short, and </a:t>
+              <a:t> quiet; their </a:t>
             </a:r>
             <a:pPr algn="l" indent="0" marL="0">
               <a:buNone/>
@@ -18082,7 +18082,7 @@
                 <a:ea typeface="Calibri" pitchFamily="34" charset="-122"/>
                 <a:cs typeface="Calibri" pitchFamily="34" charset="-120"/>
               </a:rPr>
-              <a:t> returned by afternoon.</a:t>
+              <a:t> in class was usually much louder.</a:t>
             </a:r>
             <a:endParaRPr lang="en-US" sz="1800" dirty="0"/>
           </a:p>
@@ -18365,7 +18365,7 @@
                 <a:ea typeface="Trebuchet MS" pitchFamily="34" charset="-122"/>
                 <a:cs typeface="Trebuchet MS" pitchFamily="34" charset="-120"/>
               </a:rPr>
-              <a:t>typically</a:t>
+              <a:t>untypically</a:t>
             </a:r>
             <a:endParaRPr lang="en-US" sz="1400" dirty="0"/>
           </a:p>
@@ -20080,7 +20080,7 @@
                 <a:ea typeface="Calibri" pitchFamily="34" charset="-122"/>
                 <a:cs typeface="Calibri" pitchFamily="34" charset="-120"/>
               </a:rPr>
-              <a:t>representing a normal pattern or type</a:t>
+              <a:t>representing a type or pattern</a:t>
             </a:r>
             <a:endParaRPr lang="en-US" sz="850" dirty="0"/>
           </a:p>
@@ -20192,7 +20192,7 @@
                 <a:ea typeface="Calibri" pitchFamily="34" charset="-122"/>
                 <a:cs typeface="Calibri" pitchFamily="34" charset="-120"/>
               </a:rPr>
-              <a:t>in the manner of</a:t>
+              <a:t>in a certain way (adverb)</a:t>
             </a:r>
             <a:endParaRPr lang="en-US" sz="850" dirty="0"/>
           </a:p>
@@ -21177,7 +21177,7 @@
                 <a:ea typeface="Calibri" pitchFamily="34" charset="-122"/>
                 <a:cs typeface="Calibri" pitchFamily="34" charset="-120"/>
               </a:rPr>
-              <a:t>representing a normal pattern or type</a:t>
+              <a:t>representing a type or pattern</a:t>
             </a:r>
             <a:endParaRPr lang="en-US" sz="850" dirty="0"/>
           </a:p>
@@ -21289,7 +21289,7 @@
                 <a:ea typeface="Calibri" pitchFamily="34" charset="-122"/>
                 <a:cs typeface="Calibri" pitchFamily="34" charset="-120"/>
               </a:rPr>
-              <a:t>in the manner of</a:t>
+              <a:t>in a certain way (adverb)</a:t>
             </a:r>
             <a:endParaRPr lang="en-US" sz="850" dirty="0"/>
           </a:p>
@@ -22721,7 +22721,7 @@
                 <a:ea typeface="Calibri" pitchFamily="34" charset="-122"/>
                 <a:cs typeface="Calibri" pitchFamily="34" charset="-120"/>
               </a:rPr>
-              <a:t>representing a normal pattern or type</a:t>
+              <a:t>representing a type or pattern</a:t>
             </a:r>
             <a:endParaRPr lang="en-US" sz="850" dirty="0"/>
           </a:p>
@@ -22833,7 +22833,7 @@
                 <a:ea typeface="Calibri" pitchFamily="34" charset="-122"/>
                 <a:cs typeface="Calibri" pitchFamily="34" charset="-120"/>
               </a:rPr>
-              <a:t>in the manner of</a:t>
+              <a:t>in a certain way (adverb)</a:t>
             </a:r>
             <a:endParaRPr lang="en-US" sz="850" dirty="0"/>
           </a:p>
@@ -24569,7 +24569,7 @@
                 <a:ea typeface="Trebuchet MS" pitchFamily="34" charset="-122"/>
                 <a:cs typeface="Trebuchet MS" pitchFamily="34" charset="-120"/>
               </a:rPr>
-              <a:t>typically</a:t>
+              <a:t>untypically</a:t>
             </a:r>
             <a:endParaRPr lang="en-US" sz="2800" dirty="0"/>
           </a:p>
@@ -25396,7 +25396,7 @@
                 <a:ea typeface="Trebuchet MS" pitchFamily="34" charset="-122"/>
                 <a:cs typeface="Trebuchet MS" pitchFamily="34" charset="-120"/>
               </a:rPr>
-              <a:t>typically</a:t>
+              <a:t>untypically</a:t>
             </a:r>
             <a:endParaRPr lang="en-US" sz="2800" dirty="0"/>
           </a:p>
@@ -25476,7 +25476,7 @@
         </p:nvSpPr>
         <p:spPr>
           <a:xfrm>
-            <a:off x="2938272" y="2258568"/>
+            <a:off x="2221992" y="2258568"/>
             <a:ext cx="1828800" cy="292608"/>
           </a:xfrm>
           <a:prstGeom prst="rect">
@@ -25485,11 +25485,11 @@
             </a:avLst>
           </a:prstGeom>
           <a:solidFill>
-            <a:srgbClr val="CCFBF1"/>
+            <a:srgbClr val="DDD6FE"/>
           </a:solidFill>
           <a:ln w="19050">
             <a:solidFill>
-              <a:srgbClr val="0D9488"/>
+              <a:srgbClr val="7C3AED"/>
             </a:solidFill>
             <a:prstDash val="solid"/>
           </a:ln>
@@ -25510,7 +25510,7 @@
         </p:nvSpPr>
         <p:spPr>
           <a:xfrm>
-            <a:off x="2938272" y="2258568"/>
+            <a:off x="2221992" y="2258568"/>
             <a:ext cx="1828800" cy="292608"/>
           </a:xfrm>
           <a:prstGeom prst="rect">
@@ -25529,13 +25529,13 @@
             <a:r>
               <a:rPr lang="en-US" sz="1300" b="1" dirty="0">
                 <a:solidFill>
-                  <a:srgbClr val="0F766E"/>
+                  <a:srgbClr val="4C1D95"/>
                 </a:solidFill>
                 <a:latin typeface="Trebuchet MS" pitchFamily="34" charset="0"/>
                 <a:ea typeface="Trebuchet MS" pitchFamily="34" charset="-122"/>
                 <a:cs typeface="Trebuchet MS" pitchFamily="34" charset="-120"/>
               </a:rPr>
-              <a:t>typical</a:t>
+              <a:t>un</a:t>
             </a:r>
             <a:endParaRPr lang="en-US" sz="1300" dirty="0"/>
           </a:p>
@@ -25549,7 +25549,7 @@
         </p:nvSpPr>
         <p:spPr>
           <a:xfrm>
-            <a:off x="2938272" y="2569464"/>
+            <a:off x="2221992" y="2569464"/>
             <a:ext cx="1828800" cy="201168"/>
           </a:xfrm>
           <a:prstGeom prst="rect">
@@ -25574,7 +25574,7 @@
                 <a:ea typeface="Calibri" pitchFamily="34" charset="-122"/>
                 <a:cs typeface="Calibri" pitchFamily="34" charset="-120"/>
               </a:rPr>
-              <a:t>representing a normal pattern or type</a:t>
+              <a:t>not</a:t>
             </a:r>
             <a:endParaRPr lang="en-US" sz="850" dirty="0"/>
           </a:p>
@@ -25588,7 +25588,7 @@
         </p:nvSpPr>
         <p:spPr>
           <a:xfrm>
-            <a:off x="5803392" y="2258568"/>
+            <a:off x="4370832" y="2258568"/>
             <a:ext cx="1828800" cy="292608"/>
           </a:xfrm>
           <a:prstGeom prst="rect">
@@ -25597,11 +25597,11 @@
             </a:avLst>
           </a:prstGeom>
           <a:solidFill>
-            <a:srgbClr val="FCE7F3"/>
+            <a:srgbClr val="CCFBF1"/>
           </a:solidFill>
           <a:ln w="19050">
             <a:solidFill>
-              <a:srgbClr val="DB2777"/>
+              <a:srgbClr val="0D9488"/>
             </a:solidFill>
             <a:prstDash val="solid"/>
           </a:ln>
@@ -25622,7 +25622,7 @@
         </p:nvSpPr>
         <p:spPr>
           <a:xfrm>
-            <a:off x="5803392" y="2258568"/>
+            <a:off x="4370832" y="2258568"/>
             <a:ext cx="1828800" cy="292608"/>
           </a:xfrm>
           <a:prstGeom prst="rect">
@@ -25641,13 +25641,13 @@
             <a:r>
               <a:rPr lang="en-US" sz="1300" b="1" dirty="0">
                 <a:solidFill>
-                  <a:srgbClr val="9D174D"/>
+                  <a:srgbClr val="0F766E"/>
                 </a:solidFill>
                 <a:latin typeface="Trebuchet MS" pitchFamily="34" charset="0"/>
                 <a:ea typeface="Trebuchet MS" pitchFamily="34" charset="-122"/>
                 <a:cs typeface="Trebuchet MS" pitchFamily="34" charset="-120"/>
               </a:rPr>
-              <a:t>ly</a:t>
+              <a:t>typical</a:t>
             </a:r>
             <a:endParaRPr lang="en-US" sz="1300" dirty="0"/>
           </a:p>
@@ -25661,7 +25661,7 @@
         </p:nvSpPr>
         <p:spPr>
           <a:xfrm>
-            <a:off x="5803392" y="2569464"/>
+            <a:off x="4370832" y="2569464"/>
             <a:ext cx="1828800" cy="201168"/>
           </a:xfrm>
           <a:prstGeom prst="rect">
@@ -25686,7 +25686,7 @@
                 <a:ea typeface="Calibri" pitchFamily="34" charset="-122"/>
                 <a:cs typeface="Calibri" pitchFamily="34" charset="-120"/>
               </a:rPr>
-              <a:t>in the manner of</a:t>
+              <a:t>representing a type or pattern</a:t>
             </a:r>
             <a:endParaRPr lang="en-US" sz="850" dirty="0"/>
           </a:p>
@@ -25695,6 +25695,118 @@
       <p:sp>
         <p:nvSpPr>
           <p:cNvPr id="22" name="Shape 20"/>
+          <p:cNvSpPr/>
+          <p:nvPr/>
+        </p:nvSpPr>
+        <p:spPr>
+          <a:xfrm>
+            <a:off x="6519672" y="2258568"/>
+            <a:ext cx="1828800" cy="292608"/>
+          </a:xfrm>
+          <a:prstGeom prst="rect">
+            <a:avLst>
+              <a:gd name="adj" fmla="val 25000"/>
+            </a:avLst>
+          </a:prstGeom>
+          <a:solidFill>
+            <a:srgbClr val="FCE7F3"/>
+          </a:solidFill>
+          <a:ln w="19050">
+            <a:solidFill>
+              <a:srgbClr val="DB2777"/>
+            </a:solidFill>
+            <a:prstDash val="solid"/>
+          </a:ln>
+          <a:effectLst>
+            <a:outerShdw sx="100000" sy="100000" kx="0" ky="0" algn="bl" rotWithShape="0" blurRad="101600" dist="38100" dir="8100000">
+              <a:srgbClr val="000000">
+                <a:alpha val="12000"/>
+              </a:srgbClr>
+            </a:outerShdw>
+          </a:effectLst>
+        </p:spPr>
+      </p:sp>
+      <p:sp>
+        <p:nvSpPr>
+          <p:cNvPr id="23" name="Text 21"/>
+          <p:cNvSpPr/>
+          <p:nvPr/>
+        </p:nvSpPr>
+        <p:spPr>
+          <a:xfrm>
+            <a:off x="6519672" y="2258568"/>
+            <a:ext cx="1828800" cy="292608"/>
+          </a:xfrm>
+          <a:prstGeom prst="rect">
+            <a:avLst/>
+          </a:prstGeom>
+          <a:noFill/>
+          <a:ln/>
+        </p:spPr>
+        <p:txBody>
+          <a:bodyPr wrap="square" lIns="0" tIns="0" rIns="0" bIns="0" rtlCol="0" anchor="ctr"/>
+          <a:lstStyle/>
+          <a:p>
+            <a:pPr algn="ctr" indent="0" marL="0">
+              <a:buNone/>
+            </a:pPr>
+            <a:r>
+              <a:rPr lang="en-US" sz="1300" b="1" dirty="0">
+                <a:solidFill>
+                  <a:srgbClr val="9D174D"/>
+                </a:solidFill>
+                <a:latin typeface="Trebuchet MS" pitchFamily="34" charset="0"/>
+                <a:ea typeface="Trebuchet MS" pitchFamily="34" charset="-122"/>
+                <a:cs typeface="Trebuchet MS" pitchFamily="34" charset="-120"/>
+              </a:rPr>
+              <a:t>ly</a:t>
+            </a:r>
+            <a:endParaRPr lang="en-US" sz="1300" dirty="0"/>
+          </a:p>
+        </p:txBody>
+      </p:sp>
+      <p:sp>
+        <p:nvSpPr>
+          <p:cNvPr id="24" name="Text 22"/>
+          <p:cNvSpPr/>
+          <p:nvPr/>
+        </p:nvSpPr>
+        <p:spPr>
+          <a:xfrm>
+            <a:off x="6519672" y="2569464"/>
+            <a:ext cx="1828800" cy="201168"/>
+          </a:xfrm>
+          <a:prstGeom prst="rect">
+            <a:avLst/>
+          </a:prstGeom>
+          <a:noFill/>
+          <a:ln/>
+        </p:spPr>
+        <p:txBody>
+          <a:bodyPr wrap="square" lIns="0" tIns="0" rIns="0" bIns="0" rtlCol="0" anchor="t"/>
+          <a:lstStyle/>
+          <a:p>
+            <a:pPr algn="ctr" indent="0" marL="0">
+              <a:buNone/>
+            </a:pPr>
+            <a:r>
+              <a:rPr lang="en-US" sz="850" dirty="0">
+                <a:solidFill>
+                  <a:srgbClr val="475569"/>
+                </a:solidFill>
+                <a:latin typeface="Calibri" pitchFamily="34" charset="0"/>
+                <a:ea typeface="Calibri" pitchFamily="34" charset="-122"/>
+                <a:cs typeface="Calibri" pitchFamily="34" charset="-120"/>
+              </a:rPr>
+              <a:t>in a certain way (adverb)</a:t>
+            </a:r>
+            <a:endParaRPr lang="en-US" sz="850" dirty="0"/>
+          </a:p>
+        </p:txBody>
+      </p:sp>
+      <p:sp>
+        <p:nvSpPr>
+          <p:cNvPr id="25" name="Shape 23"/>
           <p:cNvSpPr/>
           <p:nvPr/>
         </p:nvSpPr>
@@ -25721,7 +25833,7 @@
       </p:sp>
       <p:sp>
         <p:nvSpPr>
-          <p:cNvPr id="23" name="Text 21"/>
+          <p:cNvPr id="26" name="Text 24"/>
           <p:cNvSpPr/>
           <p:nvPr/>
         </p:nvSpPr>
@@ -25760,7 +25872,7 @@
       </p:sp>
       <p:sp>
         <p:nvSpPr>
-          <p:cNvPr id="24" name="Shape 22"/>
+          <p:cNvPr id="27" name="Shape 25"/>
           <p:cNvSpPr/>
           <p:nvPr/>
         </p:nvSpPr>
@@ -25787,7 +25899,7 @@
       </p:sp>
       <p:sp>
         <p:nvSpPr>
-          <p:cNvPr id="25" name="Text 23"/>
+          <p:cNvPr id="28" name="Text 26"/>
           <p:cNvSpPr/>
           <p:nvPr/>
         </p:nvSpPr>
@@ -25826,7 +25938,7 @@
       </p:sp>
       <p:sp>
         <p:nvSpPr>
-          <p:cNvPr id="26" name="Shape 24"/>
+          <p:cNvPr id="29" name="Shape 27"/>
           <p:cNvSpPr/>
           <p:nvPr/>
         </p:nvSpPr>
@@ -25853,7 +25965,7 @@
       </p:sp>
       <p:sp>
         <p:nvSpPr>
-          <p:cNvPr id="27" name="Text 25"/>
+          <p:cNvPr id="30" name="Text 28"/>
           <p:cNvSpPr/>
           <p:nvPr/>
         </p:nvSpPr>
@@ -25892,7 +26004,7 @@
       </p:sp>
       <p:sp>
         <p:nvSpPr>
-          <p:cNvPr id="28" name="Shape 26"/>
+          <p:cNvPr id="31" name="Shape 29"/>
           <p:cNvSpPr/>
           <p:nvPr/>
         </p:nvSpPr>
@@ -25919,7 +26031,7 @@
       </p:sp>
       <p:sp>
         <p:nvSpPr>
-          <p:cNvPr id="29" name="Text 27"/>
+          <p:cNvPr id="32" name="Text 30"/>
           <p:cNvSpPr/>
           <p:nvPr/>
         </p:nvSpPr>
@@ -27100,7 +27212,7 @@
                 <a:ea typeface="Trebuchet MS" pitchFamily="34" charset="-122"/>
                 <a:cs typeface="Trebuchet MS" pitchFamily="34" charset="-120"/>
               </a:rPr>
-              <a:t>typically</a:t>
+              <a:t>untypically</a:t>
             </a:r>
             <a:endParaRPr lang="en-US" sz="2800" dirty="0"/>
           </a:p>
@@ -27180,7 +27292,7 @@
         </p:nvSpPr>
         <p:spPr>
           <a:xfrm>
-            <a:off x="2938272" y="2258568"/>
+            <a:off x="2221992" y="2258568"/>
             <a:ext cx="1828800" cy="292608"/>
           </a:xfrm>
           <a:prstGeom prst="rect">
@@ -27189,11 +27301,11 @@
             </a:avLst>
           </a:prstGeom>
           <a:solidFill>
-            <a:srgbClr val="CCFBF1"/>
+            <a:srgbClr val="DDD6FE"/>
           </a:solidFill>
           <a:ln w="19050">
             <a:solidFill>
-              <a:srgbClr val="0D9488"/>
+              <a:srgbClr val="7C3AED"/>
             </a:solidFill>
             <a:prstDash val="solid"/>
           </a:ln>
@@ -27214,7 +27326,7 @@
         </p:nvSpPr>
         <p:spPr>
           <a:xfrm>
-            <a:off x="2938272" y="2258568"/>
+            <a:off x="2221992" y="2258568"/>
             <a:ext cx="1828800" cy="292608"/>
           </a:xfrm>
           <a:prstGeom prst="rect">
@@ -27233,13 +27345,13 @@
             <a:r>
               <a:rPr lang="en-US" sz="1300" b="1" dirty="0">
                 <a:solidFill>
-                  <a:srgbClr val="0F766E"/>
+                  <a:srgbClr val="4C1D95"/>
                 </a:solidFill>
                 <a:latin typeface="Trebuchet MS" pitchFamily="34" charset="0"/>
                 <a:ea typeface="Trebuchet MS" pitchFamily="34" charset="-122"/>
                 <a:cs typeface="Trebuchet MS" pitchFamily="34" charset="-120"/>
               </a:rPr>
-              <a:t>typical</a:t>
+              <a:t>un</a:t>
             </a:r>
             <a:endParaRPr lang="en-US" sz="1300" dirty="0"/>
           </a:p>
@@ -27253,7 +27365,7 @@
         </p:nvSpPr>
         <p:spPr>
           <a:xfrm>
-            <a:off x="2938272" y="2569464"/>
+            <a:off x="2221992" y="2569464"/>
             <a:ext cx="1828800" cy="201168"/>
           </a:xfrm>
           <a:prstGeom prst="rect">
@@ -27278,7 +27390,7 @@
                 <a:ea typeface="Calibri" pitchFamily="34" charset="-122"/>
                 <a:cs typeface="Calibri" pitchFamily="34" charset="-120"/>
               </a:rPr>
-              <a:t>representing a normal pattern or type</a:t>
+              <a:t>not</a:t>
             </a:r>
             <a:endParaRPr lang="en-US" sz="850" dirty="0"/>
           </a:p>
@@ -27292,7 +27404,7 @@
         </p:nvSpPr>
         <p:spPr>
           <a:xfrm>
-            <a:off x="5803392" y="2258568"/>
+            <a:off x="4370832" y="2258568"/>
             <a:ext cx="1828800" cy="292608"/>
           </a:xfrm>
           <a:prstGeom prst="rect">
@@ -27301,11 +27413,11 @@
             </a:avLst>
           </a:prstGeom>
           <a:solidFill>
-            <a:srgbClr val="FCE7F3"/>
+            <a:srgbClr val="CCFBF1"/>
           </a:solidFill>
           <a:ln w="19050">
             <a:solidFill>
-              <a:srgbClr val="DB2777"/>
+              <a:srgbClr val="0D9488"/>
             </a:solidFill>
             <a:prstDash val="solid"/>
           </a:ln>
@@ -27326,7 +27438,7 @@
         </p:nvSpPr>
         <p:spPr>
           <a:xfrm>
-            <a:off x="5803392" y="2258568"/>
+            <a:off x="4370832" y="2258568"/>
             <a:ext cx="1828800" cy="292608"/>
           </a:xfrm>
           <a:prstGeom prst="rect">
@@ -27345,13 +27457,13 @@
             <a:r>
               <a:rPr lang="en-US" sz="1300" b="1" dirty="0">
                 <a:solidFill>
-                  <a:srgbClr val="9D174D"/>
+                  <a:srgbClr val="0F766E"/>
                 </a:solidFill>
                 <a:latin typeface="Trebuchet MS" pitchFamily="34" charset="0"/>
                 <a:ea typeface="Trebuchet MS" pitchFamily="34" charset="-122"/>
                 <a:cs typeface="Trebuchet MS" pitchFamily="34" charset="-120"/>
               </a:rPr>
-              <a:t>ly</a:t>
+              <a:t>typical</a:t>
             </a:r>
             <a:endParaRPr lang="en-US" sz="1300" dirty="0"/>
           </a:p>
@@ -27365,7 +27477,7 @@
         </p:nvSpPr>
         <p:spPr>
           <a:xfrm>
-            <a:off x="5803392" y="2569464"/>
+            <a:off x="4370832" y="2569464"/>
             <a:ext cx="1828800" cy="201168"/>
           </a:xfrm>
           <a:prstGeom prst="rect">
@@ -27390,7 +27502,7 @@
                 <a:ea typeface="Calibri" pitchFamily="34" charset="-122"/>
                 <a:cs typeface="Calibri" pitchFamily="34" charset="-120"/>
               </a:rPr>
-              <a:t>in the manner of</a:t>
+              <a:t>representing a type or pattern</a:t>
             </a:r>
             <a:endParaRPr lang="en-US" sz="850" dirty="0"/>
           </a:p>
@@ -27399,6 +27511,118 @@
       <p:sp>
         <p:nvSpPr>
           <p:cNvPr id="22" name="Shape 20"/>
+          <p:cNvSpPr/>
+          <p:nvPr/>
+        </p:nvSpPr>
+        <p:spPr>
+          <a:xfrm>
+            <a:off x="6519672" y="2258568"/>
+            <a:ext cx="1828800" cy="292608"/>
+          </a:xfrm>
+          <a:prstGeom prst="rect">
+            <a:avLst>
+              <a:gd name="adj" fmla="val 25000"/>
+            </a:avLst>
+          </a:prstGeom>
+          <a:solidFill>
+            <a:srgbClr val="FCE7F3"/>
+          </a:solidFill>
+          <a:ln w="19050">
+            <a:solidFill>
+              <a:srgbClr val="DB2777"/>
+            </a:solidFill>
+            <a:prstDash val="solid"/>
+          </a:ln>
+          <a:effectLst>
+            <a:outerShdw sx="100000" sy="100000" kx="0" ky="0" algn="bl" rotWithShape="0" blurRad="101600" dist="38100" dir="8100000">
+              <a:srgbClr val="000000">
+                <a:alpha val="12000"/>
+              </a:srgbClr>
+            </a:outerShdw>
+          </a:effectLst>
+        </p:spPr>
+      </p:sp>
+      <p:sp>
+        <p:nvSpPr>
+          <p:cNvPr id="23" name="Text 21"/>
+          <p:cNvSpPr/>
+          <p:nvPr/>
+        </p:nvSpPr>
+        <p:spPr>
+          <a:xfrm>
+            <a:off x="6519672" y="2258568"/>
+            <a:ext cx="1828800" cy="292608"/>
+          </a:xfrm>
+          <a:prstGeom prst="rect">
+            <a:avLst/>
+          </a:prstGeom>
+          <a:noFill/>
+          <a:ln/>
+        </p:spPr>
+        <p:txBody>
+          <a:bodyPr wrap="square" lIns="0" tIns="0" rIns="0" bIns="0" rtlCol="0" anchor="ctr"/>
+          <a:lstStyle/>
+          <a:p>
+            <a:pPr algn="ctr" indent="0" marL="0">
+              <a:buNone/>
+            </a:pPr>
+            <a:r>
+              <a:rPr lang="en-US" sz="1300" b="1" dirty="0">
+                <a:solidFill>
+                  <a:srgbClr val="9D174D"/>
+                </a:solidFill>
+                <a:latin typeface="Trebuchet MS" pitchFamily="34" charset="0"/>
+                <a:ea typeface="Trebuchet MS" pitchFamily="34" charset="-122"/>
+                <a:cs typeface="Trebuchet MS" pitchFamily="34" charset="-120"/>
+              </a:rPr>
+              <a:t>ly</a:t>
+            </a:r>
+            <a:endParaRPr lang="en-US" sz="1300" dirty="0"/>
+          </a:p>
+        </p:txBody>
+      </p:sp>
+      <p:sp>
+        <p:nvSpPr>
+          <p:cNvPr id="24" name="Text 22"/>
+          <p:cNvSpPr/>
+          <p:nvPr/>
+        </p:nvSpPr>
+        <p:spPr>
+          <a:xfrm>
+            <a:off x="6519672" y="2569464"/>
+            <a:ext cx="1828800" cy="201168"/>
+          </a:xfrm>
+          <a:prstGeom prst="rect">
+            <a:avLst/>
+          </a:prstGeom>
+          <a:noFill/>
+          <a:ln/>
+        </p:spPr>
+        <p:txBody>
+          <a:bodyPr wrap="square" lIns="0" tIns="0" rIns="0" bIns="0" rtlCol="0" anchor="t"/>
+          <a:lstStyle/>
+          <a:p>
+            <a:pPr algn="ctr" indent="0" marL="0">
+              <a:buNone/>
+            </a:pPr>
+            <a:r>
+              <a:rPr lang="en-US" sz="850" dirty="0">
+                <a:solidFill>
+                  <a:srgbClr val="475569"/>
+                </a:solidFill>
+                <a:latin typeface="Calibri" pitchFamily="34" charset="0"/>
+                <a:ea typeface="Calibri" pitchFamily="34" charset="-122"/>
+                <a:cs typeface="Calibri" pitchFamily="34" charset="-120"/>
+              </a:rPr>
+              <a:t>in a certain way (adverb)</a:t>
+            </a:r>
+            <a:endParaRPr lang="en-US" sz="850" dirty="0"/>
+          </a:p>
+        </p:txBody>
+      </p:sp>
+      <p:sp>
+        <p:nvSpPr>
+          <p:cNvPr id="25" name="Shape 23"/>
           <p:cNvSpPr/>
           <p:nvPr/>
         </p:nvSpPr>
@@ -27425,7 +27649,7 @@
       </p:sp>
       <p:sp>
         <p:nvSpPr>
-          <p:cNvPr id="23" name="Text 21"/>
+          <p:cNvPr id="26" name="Text 24"/>
           <p:cNvSpPr/>
           <p:nvPr/>
         </p:nvSpPr>
@@ -27464,7 +27688,7 @@
       </p:sp>
       <p:sp>
         <p:nvSpPr>
-          <p:cNvPr id="24" name="Shape 22"/>
+          <p:cNvPr id="27" name="Shape 25"/>
           <p:cNvSpPr/>
           <p:nvPr/>
         </p:nvSpPr>
@@ -27491,14 +27715,14 @@
       </p:sp>
       <p:sp>
         <p:nvSpPr>
-          <p:cNvPr id="25" name="Shape 23"/>
-          <p:cNvSpPr/>
-          <p:nvPr/>
-        </p:nvSpPr>
-        <p:spPr>
-          <a:xfrm>
-            <a:off x="1975104" y="3364992"/>
-            <a:ext cx="1554480" cy="475488"/>
+          <p:cNvPr id="28" name="Shape 26"/>
+          <p:cNvSpPr/>
+          <p:nvPr/>
+        </p:nvSpPr>
+        <p:spPr>
+          <a:xfrm>
+            <a:off x="1978152" y="3364992"/>
+            <a:ext cx="1225296" cy="475488"/>
           </a:xfrm>
           <a:prstGeom prst="rect">
             <a:avLst>
@@ -27518,14 +27742,14 @@
       </p:sp>
       <p:sp>
         <p:nvSpPr>
-          <p:cNvPr id="26" name="Text 24"/>
-          <p:cNvSpPr/>
-          <p:nvPr/>
-        </p:nvSpPr>
-        <p:spPr>
-          <a:xfrm>
-            <a:off x="1975104" y="3364992"/>
-            <a:ext cx="1554480" cy="475488"/>
+          <p:cNvPr id="29" name="Text 27"/>
+          <p:cNvSpPr/>
+          <p:nvPr/>
+        </p:nvSpPr>
+        <p:spPr>
+          <a:xfrm>
+            <a:off x="1978152" y="3364992"/>
+            <a:ext cx="1225296" cy="475488"/>
           </a:xfrm>
           <a:prstGeom prst="rect">
             <a:avLst/>
@@ -27549,7 +27773,7 @@
                 <a:ea typeface="Trebuchet MS" pitchFamily="34" charset="-122"/>
                 <a:cs typeface="Trebuchet MS" pitchFamily="34" charset="-120"/>
               </a:rPr>
-              <a:t>typ</a:t>
+              <a:t>un</a:t>
             </a:r>
             <a:endParaRPr lang="en-US" sz="1400" dirty="0"/>
           </a:p>
@@ -27557,14 +27781,14 @@
       </p:sp>
       <p:sp>
         <p:nvSpPr>
-          <p:cNvPr id="27" name="Text 25"/>
-          <p:cNvSpPr/>
-          <p:nvPr/>
-        </p:nvSpPr>
-        <p:spPr>
-          <a:xfrm>
-            <a:off x="3529584" y="3364992"/>
-            <a:ext cx="73152" cy="475488"/>
+          <p:cNvPr id="30" name="Text 28"/>
+          <p:cNvSpPr/>
+          <p:nvPr/>
+        </p:nvSpPr>
+        <p:spPr>
+          <a:xfrm>
+            <a:off x="3203448" y="3364992"/>
+            <a:ext cx="76200" cy="475488"/>
           </a:xfrm>
           <a:prstGeom prst="rect">
             <a:avLst/>
@@ -27596,14 +27820,14 @@
       </p:sp>
       <p:sp>
         <p:nvSpPr>
-          <p:cNvPr id="28" name="Shape 26"/>
-          <p:cNvSpPr/>
-          <p:nvPr/>
-        </p:nvSpPr>
-        <p:spPr>
-          <a:xfrm>
-            <a:off x="3602736" y="3364992"/>
-            <a:ext cx="1554480" cy="475488"/>
+          <p:cNvPr id="31" name="Shape 29"/>
+          <p:cNvSpPr/>
+          <p:nvPr/>
+        </p:nvSpPr>
+        <p:spPr>
+          <a:xfrm>
+            <a:off x="3279648" y="3364992"/>
+            <a:ext cx="1225296" cy="475488"/>
           </a:xfrm>
           <a:prstGeom prst="rect">
             <a:avLst>
@@ -27623,14 +27847,14 @@
       </p:sp>
       <p:sp>
         <p:nvSpPr>
-          <p:cNvPr id="29" name="Text 27"/>
-          <p:cNvSpPr/>
-          <p:nvPr/>
-        </p:nvSpPr>
-        <p:spPr>
-          <a:xfrm>
-            <a:off x="3602736" y="3364992"/>
-            <a:ext cx="1554480" cy="475488"/>
+          <p:cNvPr id="32" name="Text 30"/>
+          <p:cNvSpPr/>
+          <p:nvPr/>
+        </p:nvSpPr>
+        <p:spPr>
+          <a:xfrm>
+            <a:off x="3279648" y="3364992"/>
+            <a:ext cx="1225296" cy="475488"/>
           </a:xfrm>
           <a:prstGeom prst="rect">
             <a:avLst/>
@@ -27654,7 +27878,7 @@
                 <a:ea typeface="Trebuchet MS" pitchFamily="34" charset="-122"/>
                 <a:cs typeface="Trebuchet MS" pitchFamily="34" charset="-120"/>
               </a:rPr>
-              <a:t>i</a:t>
+              <a:t>typ</a:t>
             </a:r>
             <a:endParaRPr lang="en-US" sz="1400" dirty="0"/>
           </a:p>
@@ -27662,14 +27886,14 @@
       </p:sp>
       <p:sp>
         <p:nvSpPr>
-          <p:cNvPr id="30" name="Text 28"/>
-          <p:cNvSpPr/>
-          <p:nvPr/>
-        </p:nvSpPr>
-        <p:spPr>
-          <a:xfrm>
-            <a:off x="5157216" y="3364992"/>
-            <a:ext cx="73152" cy="475488"/>
+          <p:cNvPr id="33" name="Text 31"/>
+          <p:cNvSpPr/>
+          <p:nvPr/>
+        </p:nvSpPr>
+        <p:spPr>
+          <a:xfrm>
+            <a:off x="4504944" y="3364992"/>
+            <a:ext cx="76200" cy="475488"/>
           </a:xfrm>
           <a:prstGeom prst="rect">
             <a:avLst/>
@@ -27701,14 +27925,14 @@
       </p:sp>
       <p:sp>
         <p:nvSpPr>
-          <p:cNvPr id="31" name="Shape 29"/>
-          <p:cNvSpPr/>
-          <p:nvPr/>
-        </p:nvSpPr>
-        <p:spPr>
-          <a:xfrm>
-            <a:off x="5230368" y="3364992"/>
-            <a:ext cx="1554480" cy="475488"/>
+          <p:cNvPr id="34" name="Shape 32"/>
+          <p:cNvSpPr/>
+          <p:nvPr/>
+        </p:nvSpPr>
+        <p:spPr>
+          <a:xfrm>
+            <a:off x="4581144" y="3364992"/>
+            <a:ext cx="1225296" cy="475488"/>
           </a:xfrm>
           <a:prstGeom prst="rect">
             <a:avLst>
@@ -27728,14 +27952,14 @@
       </p:sp>
       <p:sp>
         <p:nvSpPr>
-          <p:cNvPr id="32" name="Text 30"/>
-          <p:cNvSpPr/>
-          <p:nvPr/>
-        </p:nvSpPr>
-        <p:spPr>
-          <a:xfrm>
-            <a:off x="5230368" y="3364992"/>
-            <a:ext cx="1554480" cy="475488"/>
+          <p:cNvPr id="35" name="Text 33"/>
+          <p:cNvSpPr/>
+          <p:nvPr/>
+        </p:nvSpPr>
+        <p:spPr>
+          <a:xfrm>
+            <a:off x="4581144" y="3364992"/>
+            <a:ext cx="1225296" cy="475488"/>
           </a:xfrm>
           <a:prstGeom prst="rect">
             <a:avLst/>
@@ -27759,7 +27983,7 @@
                 <a:ea typeface="Trebuchet MS" pitchFamily="34" charset="-122"/>
                 <a:cs typeface="Trebuchet MS" pitchFamily="34" charset="-120"/>
               </a:rPr>
-              <a:t>cal</a:t>
+              <a:t>i</a:t>
             </a:r>
             <a:endParaRPr lang="en-US" sz="1400" dirty="0"/>
           </a:p>
@@ -27767,14 +27991,14 @@
       </p:sp>
       <p:sp>
         <p:nvSpPr>
-          <p:cNvPr id="33" name="Text 31"/>
-          <p:cNvSpPr/>
-          <p:nvPr/>
-        </p:nvSpPr>
-        <p:spPr>
-          <a:xfrm>
-            <a:off x="6784848" y="3364992"/>
-            <a:ext cx="73152" cy="475488"/>
+          <p:cNvPr id="36" name="Text 34"/>
+          <p:cNvSpPr/>
+          <p:nvPr/>
+        </p:nvSpPr>
+        <p:spPr>
+          <a:xfrm>
+            <a:off x="5806440" y="3364992"/>
+            <a:ext cx="76200" cy="475488"/>
           </a:xfrm>
           <a:prstGeom prst="rect">
             <a:avLst/>
@@ -27806,14 +28030,14 @@
       </p:sp>
       <p:sp>
         <p:nvSpPr>
-          <p:cNvPr id="34" name="Shape 32"/>
-          <p:cNvSpPr/>
-          <p:nvPr/>
-        </p:nvSpPr>
-        <p:spPr>
-          <a:xfrm>
-            <a:off x="6858000" y="3364992"/>
-            <a:ext cx="1554480" cy="475488"/>
+          <p:cNvPr id="37" name="Shape 35"/>
+          <p:cNvSpPr/>
+          <p:nvPr/>
+        </p:nvSpPr>
+        <p:spPr>
+          <a:xfrm>
+            <a:off x="5882640" y="3364992"/>
+            <a:ext cx="1225296" cy="475488"/>
           </a:xfrm>
           <a:prstGeom prst="rect">
             <a:avLst>
@@ -27833,14 +28057,14 @@
       </p:sp>
       <p:sp>
         <p:nvSpPr>
-          <p:cNvPr id="35" name="Text 33"/>
-          <p:cNvSpPr/>
-          <p:nvPr/>
-        </p:nvSpPr>
-        <p:spPr>
-          <a:xfrm>
-            <a:off x="6858000" y="3364992"/>
-            <a:ext cx="1554480" cy="475488"/>
+          <p:cNvPr id="38" name="Text 36"/>
+          <p:cNvSpPr/>
+          <p:nvPr/>
+        </p:nvSpPr>
+        <p:spPr>
+          <a:xfrm>
+            <a:off x="5882640" y="3364992"/>
+            <a:ext cx="1225296" cy="475488"/>
           </a:xfrm>
           <a:prstGeom prst="rect">
             <a:avLst/>
@@ -27864,6 +28088,111 @@
                 <a:ea typeface="Trebuchet MS" pitchFamily="34" charset="-122"/>
                 <a:cs typeface="Trebuchet MS" pitchFamily="34" charset="-120"/>
               </a:rPr>
+              <a:t>cal</a:t>
+            </a:r>
+            <a:endParaRPr lang="en-US" sz="1400" dirty="0"/>
+          </a:p>
+        </p:txBody>
+      </p:sp>
+      <p:sp>
+        <p:nvSpPr>
+          <p:cNvPr id="39" name="Text 37"/>
+          <p:cNvSpPr/>
+          <p:nvPr/>
+        </p:nvSpPr>
+        <p:spPr>
+          <a:xfrm>
+            <a:off x="7107936" y="3364992"/>
+            <a:ext cx="76200" cy="475488"/>
+          </a:xfrm>
+          <a:prstGeom prst="rect">
+            <a:avLst/>
+          </a:prstGeom>
+          <a:noFill/>
+          <a:ln/>
+        </p:spPr>
+        <p:txBody>
+          <a:bodyPr wrap="square" lIns="0" tIns="0" rIns="0" bIns="0" rtlCol="0" anchor="ctr"/>
+          <a:lstStyle/>
+          <a:p>
+            <a:pPr algn="ctr" indent="0" marL="0">
+              <a:buNone/>
+            </a:pPr>
+            <a:r>
+              <a:rPr lang="en-US" sz="1600" b="1" dirty="0">
+                <a:solidFill>
+                  <a:srgbClr val="0D9488"/>
+                </a:solidFill>
+                <a:latin typeface="Trebuchet MS" pitchFamily="34" charset="0"/>
+                <a:ea typeface="Trebuchet MS" pitchFamily="34" charset="-122"/>
+                <a:cs typeface="Trebuchet MS" pitchFamily="34" charset="-120"/>
+              </a:rPr>
+              <a:t>·</a:t>
+            </a:r>
+            <a:endParaRPr lang="en-US" sz="1600" dirty="0"/>
+          </a:p>
+        </p:txBody>
+      </p:sp>
+      <p:sp>
+        <p:nvSpPr>
+          <p:cNvPr id="40" name="Shape 38"/>
+          <p:cNvSpPr/>
+          <p:nvPr/>
+        </p:nvSpPr>
+        <p:spPr>
+          <a:xfrm>
+            <a:off x="7184136" y="3364992"/>
+            <a:ext cx="1225296" cy="475488"/>
+          </a:xfrm>
+          <a:prstGeom prst="rect">
+            <a:avLst>
+              <a:gd name="adj" fmla="val 9615"/>
+            </a:avLst>
+          </a:prstGeom>
+          <a:solidFill>
+            <a:srgbClr val="FFFFFF"/>
+          </a:solidFill>
+          <a:ln w="12700">
+            <a:solidFill>
+              <a:srgbClr val="0D9488"/>
+            </a:solidFill>
+            <a:prstDash val="solid"/>
+          </a:ln>
+        </p:spPr>
+      </p:sp>
+      <p:sp>
+        <p:nvSpPr>
+          <p:cNvPr id="41" name="Text 39"/>
+          <p:cNvSpPr/>
+          <p:nvPr/>
+        </p:nvSpPr>
+        <p:spPr>
+          <a:xfrm>
+            <a:off x="7184136" y="3364992"/>
+            <a:ext cx="1225296" cy="475488"/>
+          </a:xfrm>
+          <a:prstGeom prst="rect">
+            <a:avLst/>
+          </a:prstGeom>
+          <a:noFill/>
+          <a:ln/>
+        </p:spPr>
+        <p:txBody>
+          <a:bodyPr wrap="square" lIns="0" tIns="0" rIns="0" bIns="0" rtlCol="0" anchor="ctr"/>
+          <a:lstStyle/>
+          <a:p>
+            <a:pPr algn="ctr" indent="0" marL="0">
+              <a:buNone/>
+            </a:pPr>
+            <a:r>
+              <a:rPr lang="en-US" sz="1400" b="1" dirty="0">
+                <a:solidFill>
+                  <a:srgbClr val="0D9488"/>
+                </a:solidFill>
+                <a:latin typeface="Trebuchet MS" pitchFamily="34" charset="0"/>
+                <a:ea typeface="Trebuchet MS" pitchFamily="34" charset="-122"/>
+                <a:cs typeface="Trebuchet MS" pitchFamily="34" charset="-120"/>
+              </a:rPr>
               <a:t>ly</a:t>
             </a:r>
             <a:endParaRPr lang="en-US" sz="1400" dirty="0"/>
@@ -27872,7 +28201,7 @@
       </p:sp>
       <p:sp>
         <p:nvSpPr>
-          <p:cNvPr id="36" name="Shape 34"/>
+          <p:cNvPr id="42" name="Shape 40"/>
           <p:cNvSpPr/>
           <p:nvPr/>
         </p:nvSpPr>
@@ -27899,7 +28228,7 @@
       </p:sp>
       <p:sp>
         <p:nvSpPr>
-          <p:cNvPr id="37" name="Text 35"/>
+          <p:cNvPr id="43" name="Text 41"/>
           <p:cNvSpPr/>
           <p:nvPr/>
         </p:nvSpPr>
@@ -27938,7 +28267,7 @@
       </p:sp>
       <p:sp>
         <p:nvSpPr>
-          <p:cNvPr id="38" name="Shape 36"/>
+          <p:cNvPr id="44" name="Shape 42"/>
           <p:cNvSpPr/>
           <p:nvPr/>
         </p:nvSpPr>
@@ -27965,7 +28294,7 @@
       </p:sp>
       <p:sp>
         <p:nvSpPr>
-          <p:cNvPr id="39" name="Text 37"/>
+          <p:cNvPr id="45" name="Text 43"/>
           <p:cNvSpPr/>
           <p:nvPr/>
         </p:nvSpPr>
@@ -28427,7 +28756,7 @@
                 <a:ea typeface="Trebuchet MS" pitchFamily="34" charset="-122"/>
                 <a:cs typeface="Trebuchet MS" pitchFamily="34" charset="-120"/>
               </a:rPr>
-              <a:t>typically</a:t>
+              <a:t>untypically</a:t>
             </a:r>
             <a:endParaRPr lang="en-US" sz="2800" dirty="0"/>
           </a:p>
@@ -28507,7 +28836,7 @@
         </p:nvSpPr>
         <p:spPr>
           <a:xfrm>
-            <a:off x="2938272" y="2258568"/>
+            <a:off x="2221992" y="2258568"/>
             <a:ext cx="1828800" cy="292608"/>
           </a:xfrm>
           <a:prstGeom prst="rect">
@@ -28516,11 +28845,11 @@
             </a:avLst>
           </a:prstGeom>
           <a:solidFill>
-            <a:srgbClr val="CCFBF1"/>
+            <a:srgbClr val="DDD6FE"/>
           </a:solidFill>
           <a:ln w="19050">
             <a:solidFill>
-              <a:srgbClr val="0D9488"/>
+              <a:srgbClr val="7C3AED"/>
             </a:solidFill>
             <a:prstDash val="solid"/>
           </a:ln>
@@ -28541,7 +28870,7 @@
         </p:nvSpPr>
         <p:spPr>
           <a:xfrm>
-            <a:off x="2938272" y="2258568"/>
+            <a:off x="2221992" y="2258568"/>
             <a:ext cx="1828800" cy="292608"/>
           </a:xfrm>
           <a:prstGeom prst="rect">
@@ -28560,13 +28889,13 @@
             <a:r>
               <a:rPr lang="en-US" sz="1300" b="1" dirty="0">
                 <a:solidFill>
-                  <a:srgbClr val="0F766E"/>
+                  <a:srgbClr val="4C1D95"/>
                 </a:solidFill>
                 <a:latin typeface="Trebuchet MS" pitchFamily="34" charset="0"/>
                 <a:ea typeface="Trebuchet MS" pitchFamily="34" charset="-122"/>
                 <a:cs typeface="Trebuchet MS" pitchFamily="34" charset="-120"/>
               </a:rPr>
-              <a:t>typical</a:t>
+              <a:t>un</a:t>
             </a:r>
             <a:endParaRPr lang="en-US" sz="1300" dirty="0"/>
           </a:p>
@@ -28580,7 +28909,7 @@
         </p:nvSpPr>
         <p:spPr>
           <a:xfrm>
-            <a:off x="2938272" y="2569464"/>
+            <a:off x="2221992" y="2569464"/>
             <a:ext cx="1828800" cy="201168"/>
           </a:xfrm>
           <a:prstGeom prst="rect">
@@ -28605,7 +28934,7 @@
                 <a:ea typeface="Calibri" pitchFamily="34" charset="-122"/>
                 <a:cs typeface="Calibri" pitchFamily="34" charset="-120"/>
               </a:rPr>
-              <a:t>representing a normal pattern or type</a:t>
+              <a:t>not</a:t>
             </a:r>
             <a:endParaRPr lang="en-US" sz="850" dirty="0"/>
           </a:p>
@@ -28619,7 +28948,7 @@
         </p:nvSpPr>
         <p:spPr>
           <a:xfrm>
-            <a:off x="5803392" y="2258568"/>
+            <a:off x="4370832" y="2258568"/>
             <a:ext cx="1828800" cy="292608"/>
           </a:xfrm>
           <a:prstGeom prst="rect">
@@ -28628,11 +28957,11 @@
             </a:avLst>
           </a:prstGeom>
           <a:solidFill>
-            <a:srgbClr val="FCE7F3"/>
+            <a:srgbClr val="CCFBF1"/>
           </a:solidFill>
           <a:ln w="19050">
             <a:solidFill>
-              <a:srgbClr val="DB2777"/>
+              <a:srgbClr val="0D9488"/>
             </a:solidFill>
             <a:prstDash val="solid"/>
           </a:ln>
@@ -28653,7 +28982,7 @@
         </p:nvSpPr>
         <p:spPr>
           <a:xfrm>
-            <a:off x="5803392" y="2258568"/>
+            <a:off x="4370832" y="2258568"/>
             <a:ext cx="1828800" cy="292608"/>
           </a:xfrm>
           <a:prstGeom prst="rect">
@@ -28672,13 +29001,13 @@
             <a:r>
               <a:rPr lang="en-US" sz="1300" b="1" dirty="0">
                 <a:solidFill>
-                  <a:srgbClr val="9D174D"/>
+                  <a:srgbClr val="0F766E"/>
                 </a:solidFill>
                 <a:latin typeface="Trebuchet MS" pitchFamily="34" charset="0"/>
                 <a:ea typeface="Trebuchet MS" pitchFamily="34" charset="-122"/>
                 <a:cs typeface="Trebuchet MS" pitchFamily="34" charset="-120"/>
               </a:rPr>
-              <a:t>ly</a:t>
+              <a:t>typical</a:t>
             </a:r>
             <a:endParaRPr lang="en-US" sz="1300" dirty="0"/>
           </a:p>
@@ -28692,7 +29021,7 @@
         </p:nvSpPr>
         <p:spPr>
           <a:xfrm>
-            <a:off x="5803392" y="2569464"/>
+            <a:off x="4370832" y="2569464"/>
             <a:ext cx="1828800" cy="201168"/>
           </a:xfrm>
           <a:prstGeom prst="rect">
@@ -28717,7 +29046,7 @@
                 <a:ea typeface="Calibri" pitchFamily="34" charset="-122"/>
                 <a:cs typeface="Calibri" pitchFamily="34" charset="-120"/>
               </a:rPr>
-              <a:t>in the manner of</a:t>
+              <a:t>representing a type or pattern</a:t>
             </a:r>
             <a:endParaRPr lang="en-US" sz="850" dirty="0"/>
           </a:p>
@@ -28726,6 +29055,118 @@
       <p:sp>
         <p:nvSpPr>
           <p:cNvPr id="22" name="Shape 20"/>
+          <p:cNvSpPr/>
+          <p:nvPr/>
+        </p:nvSpPr>
+        <p:spPr>
+          <a:xfrm>
+            <a:off x="6519672" y="2258568"/>
+            <a:ext cx="1828800" cy="292608"/>
+          </a:xfrm>
+          <a:prstGeom prst="rect">
+            <a:avLst>
+              <a:gd name="adj" fmla="val 25000"/>
+            </a:avLst>
+          </a:prstGeom>
+          <a:solidFill>
+            <a:srgbClr val="FCE7F3"/>
+          </a:solidFill>
+          <a:ln w="19050">
+            <a:solidFill>
+              <a:srgbClr val="DB2777"/>
+            </a:solidFill>
+            <a:prstDash val="solid"/>
+          </a:ln>
+          <a:effectLst>
+            <a:outerShdw sx="100000" sy="100000" kx="0" ky="0" algn="bl" rotWithShape="0" blurRad="101600" dist="38100" dir="8100000">
+              <a:srgbClr val="000000">
+                <a:alpha val="12000"/>
+              </a:srgbClr>
+            </a:outerShdw>
+          </a:effectLst>
+        </p:spPr>
+      </p:sp>
+      <p:sp>
+        <p:nvSpPr>
+          <p:cNvPr id="23" name="Text 21"/>
+          <p:cNvSpPr/>
+          <p:nvPr/>
+        </p:nvSpPr>
+        <p:spPr>
+          <a:xfrm>
+            <a:off x="6519672" y="2258568"/>
+            <a:ext cx="1828800" cy="292608"/>
+          </a:xfrm>
+          <a:prstGeom prst="rect">
+            <a:avLst/>
+          </a:prstGeom>
+          <a:noFill/>
+          <a:ln/>
+        </p:spPr>
+        <p:txBody>
+          <a:bodyPr wrap="square" lIns="0" tIns="0" rIns="0" bIns="0" rtlCol="0" anchor="ctr"/>
+          <a:lstStyle/>
+          <a:p>
+            <a:pPr algn="ctr" indent="0" marL="0">
+              <a:buNone/>
+            </a:pPr>
+            <a:r>
+              <a:rPr lang="en-US" sz="1300" b="1" dirty="0">
+                <a:solidFill>
+                  <a:srgbClr val="9D174D"/>
+                </a:solidFill>
+                <a:latin typeface="Trebuchet MS" pitchFamily="34" charset="0"/>
+                <a:ea typeface="Trebuchet MS" pitchFamily="34" charset="-122"/>
+                <a:cs typeface="Trebuchet MS" pitchFamily="34" charset="-120"/>
+              </a:rPr>
+              <a:t>ly</a:t>
+            </a:r>
+            <a:endParaRPr lang="en-US" sz="1300" dirty="0"/>
+          </a:p>
+        </p:txBody>
+      </p:sp>
+      <p:sp>
+        <p:nvSpPr>
+          <p:cNvPr id="24" name="Text 22"/>
+          <p:cNvSpPr/>
+          <p:nvPr/>
+        </p:nvSpPr>
+        <p:spPr>
+          <a:xfrm>
+            <a:off x="6519672" y="2569464"/>
+            <a:ext cx="1828800" cy="201168"/>
+          </a:xfrm>
+          <a:prstGeom prst="rect">
+            <a:avLst/>
+          </a:prstGeom>
+          <a:noFill/>
+          <a:ln/>
+        </p:spPr>
+        <p:txBody>
+          <a:bodyPr wrap="square" lIns="0" tIns="0" rIns="0" bIns="0" rtlCol="0" anchor="t"/>
+          <a:lstStyle/>
+          <a:p>
+            <a:pPr algn="ctr" indent="0" marL="0">
+              <a:buNone/>
+            </a:pPr>
+            <a:r>
+              <a:rPr lang="en-US" sz="850" dirty="0">
+                <a:solidFill>
+                  <a:srgbClr val="475569"/>
+                </a:solidFill>
+                <a:latin typeface="Calibri" pitchFamily="34" charset="0"/>
+                <a:ea typeface="Calibri" pitchFamily="34" charset="-122"/>
+                <a:cs typeface="Calibri" pitchFamily="34" charset="-120"/>
+              </a:rPr>
+              <a:t>in a certain way (adverb)</a:t>
+            </a:r>
+            <a:endParaRPr lang="en-US" sz="850" dirty="0"/>
+          </a:p>
+        </p:txBody>
+      </p:sp>
+      <p:sp>
+        <p:nvSpPr>
+          <p:cNvPr id="25" name="Shape 23"/>
           <p:cNvSpPr/>
           <p:nvPr/>
         </p:nvSpPr>
@@ -28752,7 +29193,7 @@
       </p:sp>
       <p:sp>
         <p:nvSpPr>
-          <p:cNvPr id="23" name="Text 21"/>
+          <p:cNvPr id="26" name="Text 24"/>
           <p:cNvSpPr/>
           <p:nvPr/>
         </p:nvSpPr>
@@ -28791,7 +29232,7 @@
       </p:sp>
       <p:sp>
         <p:nvSpPr>
-          <p:cNvPr id="24" name="Shape 22"/>
+          <p:cNvPr id="27" name="Shape 25"/>
           <p:cNvSpPr/>
           <p:nvPr/>
         </p:nvSpPr>
@@ -28818,14 +29259,14 @@
       </p:sp>
       <p:sp>
         <p:nvSpPr>
-          <p:cNvPr id="25" name="Shape 23"/>
-          <p:cNvSpPr/>
-          <p:nvPr/>
-        </p:nvSpPr>
-        <p:spPr>
-          <a:xfrm>
-            <a:off x="1975104" y="3364992"/>
-            <a:ext cx="1554480" cy="475488"/>
+          <p:cNvPr id="28" name="Shape 26"/>
+          <p:cNvSpPr/>
+          <p:nvPr/>
+        </p:nvSpPr>
+        <p:spPr>
+          <a:xfrm>
+            <a:off x="1978152" y="3364992"/>
+            <a:ext cx="1225296" cy="475488"/>
           </a:xfrm>
           <a:prstGeom prst="rect">
             <a:avLst>
@@ -28845,14 +29286,14 @@
       </p:sp>
       <p:sp>
         <p:nvSpPr>
-          <p:cNvPr id="26" name="Text 24"/>
-          <p:cNvSpPr/>
-          <p:nvPr/>
-        </p:nvSpPr>
-        <p:spPr>
-          <a:xfrm>
-            <a:off x="1975104" y="3364992"/>
-            <a:ext cx="1554480" cy="475488"/>
+          <p:cNvPr id="29" name="Text 27"/>
+          <p:cNvSpPr/>
+          <p:nvPr/>
+        </p:nvSpPr>
+        <p:spPr>
+          <a:xfrm>
+            <a:off x="1978152" y="3364992"/>
+            <a:ext cx="1225296" cy="475488"/>
           </a:xfrm>
           <a:prstGeom prst="rect">
             <a:avLst/>
@@ -28876,7 +29317,7 @@
                 <a:ea typeface="Trebuchet MS" pitchFamily="34" charset="-122"/>
                 <a:cs typeface="Trebuchet MS" pitchFamily="34" charset="-120"/>
               </a:rPr>
-              <a:t>typ</a:t>
+              <a:t>un</a:t>
             </a:r>
             <a:endParaRPr lang="en-US" sz="1400" dirty="0"/>
           </a:p>
@@ -28884,14 +29325,14 @@
       </p:sp>
       <p:sp>
         <p:nvSpPr>
-          <p:cNvPr id="27" name="Text 25"/>
-          <p:cNvSpPr/>
-          <p:nvPr/>
-        </p:nvSpPr>
-        <p:spPr>
-          <a:xfrm>
-            <a:off x="3529584" y="3364992"/>
-            <a:ext cx="73152" cy="475488"/>
+          <p:cNvPr id="30" name="Text 28"/>
+          <p:cNvSpPr/>
+          <p:nvPr/>
+        </p:nvSpPr>
+        <p:spPr>
+          <a:xfrm>
+            <a:off x="3203448" y="3364992"/>
+            <a:ext cx="76200" cy="475488"/>
           </a:xfrm>
           <a:prstGeom prst="rect">
             <a:avLst/>
@@ -28923,14 +29364,14 @@
       </p:sp>
       <p:sp>
         <p:nvSpPr>
-          <p:cNvPr id="28" name="Shape 26"/>
-          <p:cNvSpPr/>
-          <p:nvPr/>
-        </p:nvSpPr>
-        <p:spPr>
-          <a:xfrm>
-            <a:off x="3602736" y="3364992"/>
-            <a:ext cx="1554480" cy="475488"/>
+          <p:cNvPr id="31" name="Shape 29"/>
+          <p:cNvSpPr/>
+          <p:nvPr/>
+        </p:nvSpPr>
+        <p:spPr>
+          <a:xfrm>
+            <a:off x="3279648" y="3364992"/>
+            <a:ext cx="1225296" cy="475488"/>
           </a:xfrm>
           <a:prstGeom prst="rect">
             <a:avLst>
@@ -28950,14 +29391,14 @@
       </p:sp>
       <p:sp>
         <p:nvSpPr>
-          <p:cNvPr id="29" name="Text 27"/>
-          <p:cNvSpPr/>
-          <p:nvPr/>
-        </p:nvSpPr>
-        <p:spPr>
-          <a:xfrm>
-            <a:off x="3602736" y="3364992"/>
-            <a:ext cx="1554480" cy="475488"/>
+          <p:cNvPr id="32" name="Text 30"/>
+          <p:cNvSpPr/>
+          <p:nvPr/>
+        </p:nvSpPr>
+        <p:spPr>
+          <a:xfrm>
+            <a:off x="3279648" y="3364992"/>
+            <a:ext cx="1225296" cy="475488"/>
           </a:xfrm>
           <a:prstGeom prst="rect">
             <a:avLst/>
@@ -28981,7 +29422,7 @@
                 <a:ea typeface="Trebuchet MS" pitchFamily="34" charset="-122"/>
                 <a:cs typeface="Trebuchet MS" pitchFamily="34" charset="-120"/>
               </a:rPr>
-              <a:t>i</a:t>
+              <a:t>typ</a:t>
             </a:r>
             <a:endParaRPr lang="en-US" sz="1400" dirty="0"/>
           </a:p>
@@ -28989,14 +29430,14 @@
       </p:sp>
       <p:sp>
         <p:nvSpPr>
-          <p:cNvPr id="30" name="Text 28"/>
-          <p:cNvSpPr/>
-          <p:nvPr/>
-        </p:nvSpPr>
-        <p:spPr>
-          <a:xfrm>
-            <a:off x="5157216" y="3364992"/>
-            <a:ext cx="73152" cy="475488"/>
+          <p:cNvPr id="33" name="Text 31"/>
+          <p:cNvSpPr/>
+          <p:nvPr/>
+        </p:nvSpPr>
+        <p:spPr>
+          <a:xfrm>
+            <a:off x="4504944" y="3364992"/>
+            <a:ext cx="76200" cy="475488"/>
           </a:xfrm>
           <a:prstGeom prst="rect">
             <a:avLst/>
@@ -29028,14 +29469,14 @@
       </p:sp>
       <p:sp>
         <p:nvSpPr>
-          <p:cNvPr id="31" name="Shape 29"/>
-          <p:cNvSpPr/>
-          <p:nvPr/>
-        </p:nvSpPr>
-        <p:spPr>
-          <a:xfrm>
-            <a:off x="5230368" y="3364992"/>
-            <a:ext cx="1554480" cy="475488"/>
+          <p:cNvPr id="34" name="Shape 32"/>
+          <p:cNvSpPr/>
+          <p:nvPr/>
+        </p:nvSpPr>
+        <p:spPr>
+          <a:xfrm>
+            <a:off x="4581144" y="3364992"/>
+            <a:ext cx="1225296" cy="475488"/>
           </a:xfrm>
           <a:prstGeom prst="rect">
             <a:avLst>
@@ -29055,14 +29496,14 @@
       </p:sp>
       <p:sp>
         <p:nvSpPr>
-          <p:cNvPr id="32" name="Text 30"/>
-          <p:cNvSpPr/>
-          <p:nvPr/>
-        </p:nvSpPr>
-        <p:spPr>
-          <a:xfrm>
-            <a:off x="5230368" y="3364992"/>
-            <a:ext cx="1554480" cy="475488"/>
+          <p:cNvPr id="35" name="Text 33"/>
+          <p:cNvSpPr/>
+          <p:nvPr/>
+        </p:nvSpPr>
+        <p:spPr>
+          <a:xfrm>
+            <a:off x="4581144" y="3364992"/>
+            <a:ext cx="1225296" cy="475488"/>
           </a:xfrm>
           <a:prstGeom prst="rect">
             <a:avLst/>
@@ -29086,7 +29527,7 @@
                 <a:ea typeface="Trebuchet MS" pitchFamily="34" charset="-122"/>
                 <a:cs typeface="Trebuchet MS" pitchFamily="34" charset="-120"/>
               </a:rPr>
-              <a:t>cal</a:t>
+              <a:t>i</a:t>
             </a:r>
             <a:endParaRPr lang="en-US" sz="1400" dirty="0"/>
           </a:p>
@@ -29094,14 +29535,14 @@
       </p:sp>
       <p:sp>
         <p:nvSpPr>
-          <p:cNvPr id="33" name="Text 31"/>
-          <p:cNvSpPr/>
-          <p:nvPr/>
-        </p:nvSpPr>
-        <p:spPr>
-          <a:xfrm>
-            <a:off x="6784848" y="3364992"/>
-            <a:ext cx="73152" cy="475488"/>
+          <p:cNvPr id="36" name="Text 34"/>
+          <p:cNvSpPr/>
+          <p:nvPr/>
+        </p:nvSpPr>
+        <p:spPr>
+          <a:xfrm>
+            <a:off x="5806440" y="3364992"/>
+            <a:ext cx="76200" cy="475488"/>
           </a:xfrm>
           <a:prstGeom prst="rect">
             <a:avLst/>
@@ -29133,14 +29574,14 @@
       </p:sp>
       <p:sp>
         <p:nvSpPr>
-          <p:cNvPr id="34" name="Shape 32"/>
-          <p:cNvSpPr/>
-          <p:nvPr/>
-        </p:nvSpPr>
-        <p:spPr>
-          <a:xfrm>
-            <a:off x="6858000" y="3364992"/>
-            <a:ext cx="1554480" cy="475488"/>
+          <p:cNvPr id="37" name="Shape 35"/>
+          <p:cNvSpPr/>
+          <p:nvPr/>
+        </p:nvSpPr>
+        <p:spPr>
+          <a:xfrm>
+            <a:off x="5882640" y="3364992"/>
+            <a:ext cx="1225296" cy="475488"/>
           </a:xfrm>
           <a:prstGeom prst="rect">
             <a:avLst>
@@ -29160,14 +29601,14 @@
       </p:sp>
       <p:sp>
         <p:nvSpPr>
-          <p:cNvPr id="35" name="Text 33"/>
-          <p:cNvSpPr/>
-          <p:nvPr/>
-        </p:nvSpPr>
-        <p:spPr>
-          <a:xfrm>
-            <a:off x="6858000" y="3364992"/>
-            <a:ext cx="1554480" cy="475488"/>
+          <p:cNvPr id="38" name="Text 36"/>
+          <p:cNvSpPr/>
+          <p:nvPr/>
+        </p:nvSpPr>
+        <p:spPr>
+          <a:xfrm>
+            <a:off x="5882640" y="3364992"/>
+            <a:ext cx="1225296" cy="475488"/>
           </a:xfrm>
           <a:prstGeom prst="rect">
             <a:avLst/>
@@ -29191,6 +29632,111 @@
                 <a:ea typeface="Trebuchet MS" pitchFamily="34" charset="-122"/>
                 <a:cs typeface="Trebuchet MS" pitchFamily="34" charset="-120"/>
               </a:rPr>
+              <a:t>cal</a:t>
+            </a:r>
+            <a:endParaRPr lang="en-US" sz="1400" dirty="0"/>
+          </a:p>
+        </p:txBody>
+      </p:sp>
+      <p:sp>
+        <p:nvSpPr>
+          <p:cNvPr id="39" name="Text 37"/>
+          <p:cNvSpPr/>
+          <p:nvPr/>
+        </p:nvSpPr>
+        <p:spPr>
+          <a:xfrm>
+            <a:off x="7107936" y="3364992"/>
+            <a:ext cx="76200" cy="475488"/>
+          </a:xfrm>
+          <a:prstGeom prst="rect">
+            <a:avLst/>
+          </a:prstGeom>
+          <a:noFill/>
+          <a:ln/>
+        </p:spPr>
+        <p:txBody>
+          <a:bodyPr wrap="square" lIns="0" tIns="0" rIns="0" bIns="0" rtlCol="0" anchor="ctr"/>
+          <a:lstStyle/>
+          <a:p>
+            <a:pPr algn="ctr" indent="0" marL="0">
+              <a:buNone/>
+            </a:pPr>
+            <a:r>
+              <a:rPr lang="en-US" sz="1600" b="1" dirty="0">
+                <a:solidFill>
+                  <a:srgbClr val="0D9488"/>
+                </a:solidFill>
+                <a:latin typeface="Trebuchet MS" pitchFamily="34" charset="0"/>
+                <a:ea typeface="Trebuchet MS" pitchFamily="34" charset="-122"/>
+                <a:cs typeface="Trebuchet MS" pitchFamily="34" charset="-120"/>
+              </a:rPr>
+              <a:t>·</a:t>
+            </a:r>
+            <a:endParaRPr lang="en-US" sz="1600" dirty="0"/>
+          </a:p>
+        </p:txBody>
+      </p:sp>
+      <p:sp>
+        <p:nvSpPr>
+          <p:cNvPr id="40" name="Shape 38"/>
+          <p:cNvSpPr/>
+          <p:nvPr/>
+        </p:nvSpPr>
+        <p:spPr>
+          <a:xfrm>
+            <a:off x="7184136" y="3364992"/>
+            <a:ext cx="1225296" cy="475488"/>
+          </a:xfrm>
+          <a:prstGeom prst="rect">
+            <a:avLst>
+              <a:gd name="adj" fmla="val 9615"/>
+            </a:avLst>
+          </a:prstGeom>
+          <a:solidFill>
+            <a:srgbClr val="FFFFFF"/>
+          </a:solidFill>
+          <a:ln w="12700">
+            <a:solidFill>
+              <a:srgbClr val="0D9488"/>
+            </a:solidFill>
+            <a:prstDash val="solid"/>
+          </a:ln>
+        </p:spPr>
+      </p:sp>
+      <p:sp>
+        <p:nvSpPr>
+          <p:cNvPr id="41" name="Text 39"/>
+          <p:cNvSpPr/>
+          <p:nvPr/>
+        </p:nvSpPr>
+        <p:spPr>
+          <a:xfrm>
+            <a:off x="7184136" y="3364992"/>
+            <a:ext cx="1225296" cy="475488"/>
+          </a:xfrm>
+          <a:prstGeom prst="rect">
+            <a:avLst/>
+          </a:prstGeom>
+          <a:noFill/>
+          <a:ln/>
+        </p:spPr>
+        <p:txBody>
+          <a:bodyPr wrap="square" lIns="0" tIns="0" rIns="0" bIns="0" rtlCol="0" anchor="ctr"/>
+          <a:lstStyle/>
+          <a:p>
+            <a:pPr algn="ctr" indent="0" marL="0">
+              <a:buNone/>
+            </a:pPr>
+            <a:r>
+              <a:rPr lang="en-US" sz="1400" b="1" dirty="0">
+                <a:solidFill>
+                  <a:srgbClr val="0D9488"/>
+                </a:solidFill>
+                <a:latin typeface="Trebuchet MS" pitchFamily="34" charset="0"/>
+                <a:ea typeface="Trebuchet MS" pitchFamily="34" charset="-122"/>
+                <a:cs typeface="Trebuchet MS" pitchFamily="34" charset="-120"/>
+              </a:rPr>
               <a:t>ly</a:t>
             </a:r>
             <a:endParaRPr lang="en-US" sz="1400" dirty="0"/>
@@ -29199,7 +29745,7 @@
       </p:sp>
       <p:sp>
         <p:nvSpPr>
-          <p:cNvPr id="36" name="Shape 34"/>
+          <p:cNvPr id="42" name="Shape 40"/>
           <p:cNvSpPr/>
           <p:nvPr/>
         </p:nvSpPr>
@@ -29226,7 +29772,7 @@
       </p:sp>
       <p:sp>
         <p:nvSpPr>
-          <p:cNvPr id="37" name="Text 35"/>
+          <p:cNvPr id="43" name="Text 41"/>
           <p:cNvSpPr/>
           <p:nvPr/>
         </p:nvSpPr>
@@ -29265,7 +29811,7 @@
       </p:sp>
       <p:sp>
         <p:nvSpPr>
-          <p:cNvPr id="38" name="Shape 36"/>
+          <p:cNvPr id="44" name="Shape 42"/>
           <p:cNvSpPr/>
           <p:nvPr/>
         </p:nvSpPr>
@@ -29292,14 +29838,14 @@
       </p:sp>
       <p:sp>
         <p:nvSpPr>
-          <p:cNvPr id="39" name="Shape 37"/>
-          <p:cNvSpPr/>
-          <p:nvPr/>
-        </p:nvSpPr>
-        <p:spPr>
-          <a:xfrm>
-            <a:off x="2023872" y="4169664"/>
-            <a:ext cx="685800" cy="384048"/>
+          <p:cNvPr id="45" name="Shape 43"/>
+          <p:cNvSpPr/>
+          <p:nvPr/>
+        </p:nvSpPr>
+        <p:spPr>
+          <a:xfrm>
+            <a:off x="1951828" y="4169664"/>
+            <a:ext cx="603504" cy="384048"/>
           </a:xfrm>
           <a:prstGeom prst="rect">
             <a:avLst>
@@ -29319,14 +29865,14 @@
       </p:sp>
       <p:sp>
         <p:nvSpPr>
-          <p:cNvPr id="40" name="Text 38"/>
-          <p:cNvSpPr/>
-          <p:nvPr/>
-        </p:nvSpPr>
-        <p:spPr>
-          <a:xfrm>
-            <a:off x="2023872" y="4169664"/>
-            <a:ext cx="685800" cy="384048"/>
+          <p:cNvPr id="46" name="Text 44"/>
+          <p:cNvSpPr/>
+          <p:nvPr/>
+        </p:nvSpPr>
+        <p:spPr>
+          <a:xfrm>
+            <a:off x="1951828" y="4169664"/>
+            <a:ext cx="603504" cy="384048"/>
           </a:xfrm>
           <a:prstGeom prst="rect">
             <a:avLst/>
@@ -29350,7 +29896,7 @@
                 <a:ea typeface="Trebuchet MS" pitchFamily="34" charset="-122"/>
                 <a:cs typeface="Trebuchet MS" pitchFamily="34" charset="-120"/>
               </a:rPr>
-              <a:t>t</a:t>
+              <a:t>u</a:t>
             </a:r>
             <a:endParaRPr lang="en-US" sz="900" dirty="0"/>
           </a:p>
@@ -29358,14 +29904,14 @@
       </p:sp>
       <p:sp>
         <p:nvSpPr>
-          <p:cNvPr id="41" name="Shape 39"/>
-          <p:cNvSpPr/>
-          <p:nvPr/>
-        </p:nvSpPr>
-        <p:spPr>
-          <a:xfrm>
-            <a:off x="2831592" y="4169664"/>
-            <a:ext cx="685800" cy="384048"/>
+          <p:cNvPr id="47" name="Shape 45"/>
+          <p:cNvSpPr/>
+          <p:nvPr/>
+        </p:nvSpPr>
+        <p:spPr>
+          <a:xfrm>
+            <a:off x="2605209" y="4169664"/>
+            <a:ext cx="603504" cy="384048"/>
           </a:xfrm>
           <a:prstGeom prst="rect">
             <a:avLst>
@@ -29385,14 +29931,14 @@
       </p:sp>
       <p:sp>
         <p:nvSpPr>
-          <p:cNvPr id="42" name="Text 40"/>
-          <p:cNvSpPr/>
-          <p:nvPr/>
-        </p:nvSpPr>
-        <p:spPr>
-          <a:xfrm>
-            <a:off x="2831592" y="4169664"/>
-            <a:ext cx="685800" cy="384048"/>
+          <p:cNvPr id="48" name="Text 46"/>
+          <p:cNvSpPr/>
+          <p:nvPr/>
+        </p:nvSpPr>
+        <p:spPr>
+          <a:xfrm>
+            <a:off x="2605209" y="4169664"/>
+            <a:ext cx="603504" cy="384048"/>
           </a:xfrm>
           <a:prstGeom prst="rect">
             <a:avLst/>
@@ -29416,7 +29962,7 @@
                 <a:ea typeface="Trebuchet MS" pitchFamily="34" charset="-122"/>
                 <a:cs typeface="Trebuchet MS" pitchFamily="34" charset="-120"/>
               </a:rPr>
-              <a:t>y</a:t>
+              <a:t>n</a:t>
             </a:r>
             <a:endParaRPr lang="en-US" sz="900" dirty="0"/>
           </a:p>
@@ -29424,14 +29970,14 @@
       </p:sp>
       <p:sp>
         <p:nvSpPr>
-          <p:cNvPr id="43" name="Shape 41"/>
-          <p:cNvSpPr/>
-          <p:nvPr/>
-        </p:nvSpPr>
-        <p:spPr>
-          <a:xfrm>
-            <a:off x="3639312" y="4169664"/>
-            <a:ext cx="685800" cy="384048"/>
+          <p:cNvPr id="49" name="Shape 47"/>
+          <p:cNvSpPr/>
+          <p:nvPr/>
+        </p:nvSpPr>
+        <p:spPr>
+          <a:xfrm>
+            <a:off x="3258589" y="4169664"/>
+            <a:ext cx="603504" cy="384048"/>
           </a:xfrm>
           <a:prstGeom prst="rect">
             <a:avLst>
@@ -29451,14 +29997,14 @@
       </p:sp>
       <p:sp>
         <p:nvSpPr>
-          <p:cNvPr id="44" name="Text 42"/>
-          <p:cNvSpPr/>
-          <p:nvPr/>
-        </p:nvSpPr>
-        <p:spPr>
-          <a:xfrm>
-            <a:off x="3639312" y="4169664"/>
-            <a:ext cx="685800" cy="384048"/>
+          <p:cNvPr id="50" name="Text 48"/>
+          <p:cNvSpPr/>
+          <p:nvPr/>
+        </p:nvSpPr>
+        <p:spPr>
+          <a:xfrm>
+            <a:off x="3258589" y="4169664"/>
+            <a:ext cx="603504" cy="384048"/>
           </a:xfrm>
           <a:prstGeom prst="rect">
             <a:avLst/>
@@ -29482,7 +30028,7 @@
                 <a:ea typeface="Trebuchet MS" pitchFamily="34" charset="-122"/>
                 <a:cs typeface="Trebuchet MS" pitchFamily="34" charset="-120"/>
               </a:rPr>
-              <a:t>p</a:t>
+              <a:t>t</a:t>
             </a:r>
             <a:endParaRPr lang="en-US" sz="900" dirty="0"/>
           </a:p>
@@ -29490,14 +30036,14 @@
       </p:sp>
       <p:sp>
         <p:nvSpPr>
-          <p:cNvPr id="45" name="Shape 43"/>
-          <p:cNvSpPr/>
-          <p:nvPr/>
-        </p:nvSpPr>
-        <p:spPr>
-          <a:xfrm>
-            <a:off x="4447032" y="4169664"/>
-            <a:ext cx="685800" cy="384048"/>
+          <p:cNvPr id="51" name="Shape 49"/>
+          <p:cNvSpPr/>
+          <p:nvPr/>
+        </p:nvSpPr>
+        <p:spPr>
+          <a:xfrm>
+            <a:off x="3911969" y="4169664"/>
+            <a:ext cx="603504" cy="384048"/>
           </a:xfrm>
           <a:prstGeom prst="rect">
             <a:avLst>
@@ -29517,14 +30063,14 @@
       </p:sp>
       <p:sp>
         <p:nvSpPr>
-          <p:cNvPr id="46" name="Text 44"/>
-          <p:cNvSpPr/>
-          <p:nvPr/>
-        </p:nvSpPr>
-        <p:spPr>
-          <a:xfrm>
-            <a:off x="4447032" y="4169664"/>
-            <a:ext cx="685800" cy="384048"/>
+          <p:cNvPr id="52" name="Text 50"/>
+          <p:cNvSpPr/>
+          <p:nvPr/>
+        </p:nvSpPr>
+        <p:spPr>
+          <a:xfrm>
+            <a:off x="3911969" y="4169664"/>
+            <a:ext cx="603504" cy="384048"/>
           </a:xfrm>
           <a:prstGeom prst="rect">
             <a:avLst/>
@@ -29548,7 +30094,7 @@
                 <a:ea typeface="Trebuchet MS" pitchFamily="34" charset="-122"/>
                 <a:cs typeface="Trebuchet MS" pitchFamily="34" charset="-120"/>
               </a:rPr>
-              <a:t>i</a:t>
+              <a:t>y</a:t>
             </a:r>
             <a:endParaRPr lang="en-US" sz="900" dirty="0"/>
           </a:p>
@@ -29556,14 +30102,14 @@
       </p:sp>
       <p:sp>
         <p:nvSpPr>
-          <p:cNvPr id="47" name="Shape 45"/>
-          <p:cNvSpPr/>
-          <p:nvPr/>
-        </p:nvSpPr>
-        <p:spPr>
-          <a:xfrm>
-            <a:off x="5254752" y="4169664"/>
-            <a:ext cx="685800" cy="384048"/>
+          <p:cNvPr id="53" name="Shape 51"/>
+          <p:cNvSpPr/>
+          <p:nvPr/>
+        </p:nvSpPr>
+        <p:spPr>
+          <a:xfrm>
+            <a:off x="4565350" y="4169664"/>
+            <a:ext cx="603504" cy="384048"/>
           </a:xfrm>
           <a:prstGeom prst="rect">
             <a:avLst>
@@ -29583,14 +30129,14 @@
       </p:sp>
       <p:sp>
         <p:nvSpPr>
-          <p:cNvPr id="48" name="Text 46"/>
-          <p:cNvSpPr/>
-          <p:nvPr/>
-        </p:nvSpPr>
-        <p:spPr>
-          <a:xfrm>
-            <a:off x="5254752" y="4169664"/>
-            <a:ext cx="685800" cy="384048"/>
+          <p:cNvPr id="54" name="Text 52"/>
+          <p:cNvSpPr/>
+          <p:nvPr/>
+        </p:nvSpPr>
+        <p:spPr>
+          <a:xfrm>
+            <a:off x="4565350" y="4169664"/>
+            <a:ext cx="603504" cy="384048"/>
           </a:xfrm>
           <a:prstGeom prst="rect">
             <a:avLst/>
@@ -29614,6 +30160,138 @@
                 <a:ea typeface="Trebuchet MS" pitchFamily="34" charset="-122"/>
                 <a:cs typeface="Trebuchet MS" pitchFamily="34" charset="-120"/>
               </a:rPr>
+              <a:t>p</a:t>
+            </a:r>
+            <a:endParaRPr lang="en-US" sz="900" dirty="0"/>
+          </a:p>
+        </p:txBody>
+      </p:sp>
+      <p:sp>
+        <p:nvSpPr>
+          <p:cNvPr id="55" name="Shape 53"/>
+          <p:cNvSpPr/>
+          <p:nvPr/>
+        </p:nvSpPr>
+        <p:spPr>
+          <a:xfrm>
+            <a:off x="5218730" y="4169664"/>
+            <a:ext cx="603504" cy="384048"/>
+          </a:xfrm>
+          <a:prstGeom prst="rect">
+            <a:avLst>
+              <a:gd name="adj" fmla="val 9524"/>
+            </a:avLst>
+          </a:prstGeom>
+          <a:solidFill>
+            <a:srgbClr val="FFFFFF"/>
+          </a:solidFill>
+          <a:ln w="12700">
+            <a:solidFill>
+              <a:srgbClr val="DB2777"/>
+            </a:solidFill>
+            <a:prstDash val="solid"/>
+          </a:ln>
+        </p:spPr>
+      </p:sp>
+      <p:sp>
+        <p:nvSpPr>
+          <p:cNvPr id="56" name="Text 54"/>
+          <p:cNvSpPr/>
+          <p:nvPr/>
+        </p:nvSpPr>
+        <p:spPr>
+          <a:xfrm>
+            <a:off x="5218730" y="4169664"/>
+            <a:ext cx="603504" cy="384048"/>
+          </a:xfrm>
+          <a:prstGeom prst="rect">
+            <a:avLst/>
+          </a:prstGeom>
+          <a:noFill/>
+          <a:ln/>
+        </p:spPr>
+        <p:txBody>
+          <a:bodyPr wrap="square" lIns="0" tIns="0" rIns="0" bIns="0" rtlCol="0" anchor="ctr"/>
+          <a:lstStyle/>
+          <a:p>
+            <a:pPr algn="ctr" indent="0" marL="0">
+              <a:buNone/>
+            </a:pPr>
+            <a:r>
+              <a:rPr lang="en-US" sz="900" b="1" dirty="0">
+                <a:solidFill>
+                  <a:srgbClr val="9D174D"/>
+                </a:solidFill>
+                <a:latin typeface="Trebuchet MS" pitchFamily="34" charset="0"/>
+                <a:ea typeface="Trebuchet MS" pitchFamily="34" charset="-122"/>
+                <a:cs typeface="Trebuchet MS" pitchFamily="34" charset="-120"/>
+              </a:rPr>
+              <a:t>i</a:t>
+            </a:r>
+            <a:endParaRPr lang="en-US" sz="900" dirty="0"/>
+          </a:p>
+        </p:txBody>
+      </p:sp>
+      <p:sp>
+        <p:nvSpPr>
+          <p:cNvPr id="57" name="Shape 55"/>
+          <p:cNvSpPr/>
+          <p:nvPr/>
+        </p:nvSpPr>
+        <p:spPr>
+          <a:xfrm>
+            <a:off x="5872111" y="4169664"/>
+            <a:ext cx="603504" cy="384048"/>
+          </a:xfrm>
+          <a:prstGeom prst="rect">
+            <a:avLst>
+              <a:gd name="adj" fmla="val 9524"/>
+            </a:avLst>
+          </a:prstGeom>
+          <a:solidFill>
+            <a:srgbClr val="FFFFFF"/>
+          </a:solidFill>
+          <a:ln w="12700">
+            <a:solidFill>
+              <a:srgbClr val="DB2777"/>
+            </a:solidFill>
+            <a:prstDash val="solid"/>
+          </a:ln>
+        </p:spPr>
+      </p:sp>
+      <p:sp>
+        <p:nvSpPr>
+          <p:cNvPr id="58" name="Text 56"/>
+          <p:cNvSpPr/>
+          <p:nvPr/>
+        </p:nvSpPr>
+        <p:spPr>
+          <a:xfrm>
+            <a:off x="5872111" y="4169664"/>
+            <a:ext cx="603504" cy="384048"/>
+          </a:xfrm>
+          <a:prstGeom prst="rect">
+            <a:avLst/>
+          </a:prstGeom>
+          <a:noFill/>
+          <a:ln/>
+        </p:spPr>
+        <p:txBody>
+          <a:bodyPr wrap="square" lIns="0" tIns="0" rIns="0" bIns="0" rtlCol="0" anchor="ctr"/>
+          <a:lstStyle/>
+          <a:p>
+            <a:pPr algn="ctr" indent="0" marL="0">
+              <a:buNone/>
+            </a:pPr>
+            <a:r>
+              <a:rPr lang="en-US" sz="900" b="1" dirty="0">
+                <a:solidFill>
+                  <a:srgbClr val="9D174D"/>
+                </a:solidFill>
+                <a:latin typeface="Trebuchet MS" pitchFamily="34" charset="0"/>
+                <a:ea typeface="Trebuchet MS" pitchFamily="34" charset="-122"/>
+                <a:cs typeface="Trebuchet MS" pitchFamily="34" charset="-120"/>
+              </a:rPr>
               <a:t>c</a:t>
             </a:r>
             <a:endParaRPr lang="en-US" sz="900" dirty="0"/>
@@ -29622,14 +30300,14 @@
       </p:sp>
       <p:sp>
         <p:nvSpPr>
-          <p:cNvPr id="49" name="Text 47"/>
-          <p:cNvSpPr/>
-          <p:nvPr/>
-        </p:nvSpPr>
-        <p:spPr>
-          <a:xfrm>
-            <a:off x="5254752" y="4572000"/>
-            <a:ext cx="685800" cy="219456"/>
+          <p:cNvPr id="59" name="Text 57"/>
+          <p:cNvSpPr/>
+          <p:nvPr/>
+        </p:nvSpPr>
+        <p:spPr>
+          <a:xfrm>
+            <a:off x="5872111" y="4572000"/>
+            <a:ext cx="603504" cy="219456"/>
           </a:xfrm>
           <a:prstGeom prst="rect">
             <a:avLst/>
@@ -29661,14 +30339,14 @@
       </p:sp>
       <p:sp>
         <p:nvSpPr>
-          <p:cNvPr id="50" name="Shape 48"/>
-          <p:cNvSpPr/>
-          <p:nvPr/>
-        </p:nvSpPr>
-        <p:spPr>
-          <a:xfrm>
-            <a:off x="6062472" y="4169664"/>
-            <a:ext cx="685800" cy="384048"/>
+          <p:cNvPr id="60" name="Shape 58"/>
+          <p:cNvSpPr/>
+          <p:nvPr/>
+        </p:nvSpPr>
+        <p:spPr>
+          <a:xfrm>
+            <a:off x="6525491" y="4169664"/>
+            <a:ext cx="603504" cy="384048"/>
           </a:xfrm>
           <a:prstGeom prst="rect">
             <a:avLst>
@@ -29688,14 +30366,14 @@
       </p:sp>
       <p:sp>
         <p:nvSpPr>
-          <p:cNvPr id="51" name="Text 49"/>
-          <p:cNvSpPr/>
-          <p:nvPr/>
-        </p:nvSpPr>
-        <p:spPr>
-          <a:xfrm>
-            <a:off x="6062472" y="4169664"/>
-            <a:ext cx="685800" cy="384048"/>
+          <p:cNvPr id="61" name="Text 59"/>
+          <p:cNvSpPr/>
+          <p:nvPr/>
+        </p:nvSpPr>
+        <p:spPr>
+          <a:xfrm>
+            <a:off x="6525491" y="4169664"/>
+            <a:ext cx="603504" cy="384048"/>
           </a:xfrm>
           <a:prstGeom prst="rect">
             <a:avLst/>
@@ -29727,14 +30405,14 @@
       </p:sp>
       <p:sp>
         <p:nvSpPr>
-          <p:cNvPr id="52" name="Shape 50"/>
-          <p:cNvSpPr/>
-          <p:nvPr/>
-        </p:nvSpPr>
-        <p:spPr>
-          <a:xfrm>
-            <a:off x="6870192" y="4169664"/>
-            <a:ext cx="685800" cy="384048"/>
+          <p:cNvPr id="62" name="Shape 60"/>
+          <p:cNvSpPr/>
+          <p:nvPr/>
+        </p:nvSpPr>
+        <p:spPr>
+          <a:xfrm>
+            <a:off x="7178871" y="4169664"/>
+            <a:ext cx="603504" cy="384048"/>
           </a:xfrm>
           <a:prstGeom prst="rect">
             <a:avLst>
@@ -29754,14 +30432,14 @@
       </p:sp>
       <p:sp>
         <p:nvSpPr>
-          <p:cNvPr id="53" name="Text 51"/>
-          <p:cNvSpPr/>
-          <p:nvPr/>
-        </p:nvSpPr>
-        <p:spPr>
-          <a:xfrm>
-            <a:off x="6870192" y="4169664"/>
-            <a:ext cx="685800" cy="384048"/>
+          <p:cNvPr id="63" name="Text 61"/>
+          <p:cNvSpPr/>
+          <p:nvPr/>
+        </p:nvSpPr>
+        <p:spPr>
+          <a:xfrm>
+            <a:off x="7178871" y="4169664"/>
+            <a:ext cx="603504" cy="384048"/>
           </a:xfrm>
           <a:prstGeom prst="rect">
             <a:avLst/>
@@ -29793,14 +30471,14 @@
       </p:sp>
       <p:sp>
         <p:nvSpPr>
-          <p:cNvPr id="54" name="Shape 52"/>
-          <p:cNvSpPr/>
-          <p:nvPr/>
-        </p:nvSpPr>
-        <p:spPr>
-          <a:xfrm>
-            <a:off x="7677912" y="4169664"/>
-            <a:ext cx="685800" cy="384048"/>
+          <p:cNvPr id="64" name="Shape 62"/>
+          <p:cNvSpPr/>
+          <p:nvPr/>
+        </p:nvSpPr>
+        <p:spPr>
+          <a:xfrm>
+            <a:off x="7832252" y="4169664"/>
+            <a:ext cx="603504" cy="384048"/>
           </a:xfrm>
           <a:prstGeom prst="rect">
             <a:avLst>
@@ -29820,14 +30498,14 @@
       </p:sp>
       <p:sp>
         <p:nvSpPr>
-          <p:cNvPr id="55" name="Text 53"/>
-          <p:cNvSpPr/>
-          <p:nvPr/>
-        </p:nvSpPr>
-        <p:spPr>
-          <a:xfrm>
-            <a:off x="7677912" y="4169664"/>
-            <a:ext cx="685800" cy="384048"/>
+          <p:cNvPr id="65" name="Text 63"/>
+          <p:cNvSpPr/>
+          <p:nvPr/>
+        </p:nvSpPr>
+        <p:spPr>
+          <a:xfrm>
+            <a:off x="7832252" y="4169664"/>
+            <a:ext cx="603504" cy="384048"/>
           </a:xfrm>
           <a:prstGeom prst="rect">
             <a:avLst/>
@@ -31287,7 +31965,7 @@
                 <a:ea typeface="Calibri" pitchFamily="34" charset="-122"/>
                 <a:cs typeface="Calibri" pitchFamily="34" charset="-120"/>
               </a:rPr>
-              <a:t>representing a normal pattern or type</a:t>
+              <a:t>representing a type or pattern</a:t>
             </a:r>
             <a:endParaRPr lang="en-US" sz="850" dirty="0"/>
           </a:p>
@@ -31399,7 +32077,7 @@
                 <a:ea typeface="Calibri" pitchFamily="34" charset="-122"/>
                 <a:cs typeface="Calibri" pitchFamily="34" charset="-120"/>
               </a:rPr>
-              <a:t>the state or quality of</a:t>
+              <a:t>quality or state of</a:t>
             </a:r>
             <a:endParaRPr lang="en-US" sz="850" dirty="0"/>
           </a:p>
@@ -32272,7 +32950,7 @@
                 <a:ea typeface="Calibri" pitchFamily="34" charset="-122"/>
                 <a:cs typeface="Calibri" pitchFamily="34" charset="-120"/>
               </a:rPr>
-              <a:t>representing a normal pattern or type</a:t>
+              <a:t>representing a type or pattern</a:t>
             </a:r>
             <a:endParaRPr lang="en-US" sz="850" dirty="0"/>
           </a:p>
@@ -32384,7 +33062,7 @@
                 <a:ea typeface="Calibri" pitchFamily="34" charset="-122"/>
                 <a:cs typeface="Calibri" pitchFamily="34" charset="-120"/>
               </a:rPr>
-              <a:t>the state or quality of</a:t>
+              <a:t>quality or state of</a:t>
             </a:r>
             <a:endParaRPr lang="en-US" sz="850" dirty="0"/>
           </a:p>
@@ -33704,7 +34382,7 @@
                 <a:ea typeface="Calibri" pitchFamily="34" charset="-122"/>
                 <a:cs typeface="Calibri" pitchFamily="34" charset="-120"/>
               </a:rPr>
-              <a:t>representing a normal pattern or type</a:t>
+              <a:t>representing a type or pattern</a:t>
             </a:r>
             <a:endParaRPr lang="en-US" sz="850" dirty="0"/>
           </a:p>
@@ -33816,7 +34494,7 @@
                 <a:ea typeface="Calibri" pitchFamily="34" charset="-122"/>
                 <a:cs typeface="Calibri" pitchFamily="34" charset="-120"/>
               </a:rPr>
-              <a:t>the state or quality of</a:t>
+              <a:t>quality or state of</a:t>
             </a:r>
             <a:endParaRPr lang="en-US" sz="850" dirty="0"/>
           </a:p>
@@ -37383,7 +38061,7 @@
                 <a:ea typeface="Trebuchet MS" pitchFamily="34" charset="-122"/>
                 <a:cs typeface="Trebuchet MS" pitchFamily="34" charset="-120"/>
               </a:rPr>
-              <a:t>-ness</a:t>
+              <a:t>-al</a:t>
             </a:r>
             <a:endParaRPr lang="en-US" sz="1300" dirty="0"/>
           </a:p>
@@ -37536,7 +38214,7 @@
                 <a:ea typeface="Trebuchet MS" pitchFamily="34" charset="-122"/>
                 <a:cs typeface="Trebuchet MS" pitchFamily="34" charset="-120"/>
               </a:rPr>
-              <a:t>-al</a:t>
+              <a:t>-ness</a:t>
             </a:r>
             <a:endParaRPr lang="en-US" sz="1300" dirty="0"/>
           </a:p>
@@ -37689,7 +38367,7 @@
                 <a:ea typeface="Trebuchet MS" pitchFamily="34" charset="-122"/>
                 <a:cs typeface="Trebuchet MS" pitchFamily="34" charset="-120"/>
               </a:rPr>
-              <a:t>-ise</a:t>
+              <a:t>-ally</a:t>
             </a:r>
             <a:endParaRPr lang="en-US" sz="1300" dirty="0"/>
           </a:p>
@@ -37860,7 +38538,7 @@
                 <a:ea typeface="Trebuchet MS" pitchFamily="34" charset="-122"/>
                 <a:cs typeface="Trebuchet MS" pitchFamily="34" charset="-120"/>
               </a:rPr>
-              <a:t>atypical</a:t>
+              <a:t>typically</a:t>
             </a:r>
             <a:endParaRPr lang="en-US" sz="1200" dirty="0"/>
           </a:p>
@@ -37926,7 +38604,7 @@
                 <a:ea typeface="Trebuchet MS" pitchFamily="34" charset="-122"/>
                 <a:cs typeface="Trebuchet MS" pitchFamily="34" charset="-120"/>
               </a:rPr>
-              <a:t>typically</a:t>
+              <a:t>atypical</a:t>
             </a:r>
             <a:endParaRPr lang="en-US" sz="1200" dirty="0"/>
           </a:p>
@@ -37992,7 +38670,7 @@
                 <a:ea typeface="Trebuchet MS" pitchFamily="34" charset="-122"/>
                 <a:cs typeface="Trebuchet MS" pitchFamily="34" charset="-120"/>
               </a:rPr>
-              <a:t>untypically</a:t>
+              <a:t>untypical</a:t>
             </a:r>
             <a:endParaRPr lang="en-US" sz="1200" dirty="0"/>
           </a:p>
@@ -38124,7 +38802,7 @@
                 <a:ea typeface="Trebuchet MS" pitchFamily="34" charset="-122"/>
                 <a:cs typeface="Trebuchet MS" pitchFamily="34" charset="-120"/>
               </a:rPr>
-              <a:t>typicalness</a:t>
+              <a:t>atypically</a:t>
             </a:r>
             <a:endParaRPr lang="en-US" sz="1200" dirty="0"/>
           </a:p>
@@ -38190,7 +38868,7 @@
                 <a:ea typeface="Trebuchet MS" pitchFamily="34" charset="-122"/>
                 <a:cs typeface="Trebuchet MS" pitchFamily="34" charset="-120"/>
               </a:rPr>
-              <a:t>atypically</a:t>
+              <a:t>untypically</a:t>
             </a:r>
             <a:endParaRPr lang="en-US" sz="1200" dirty="0"/>
           </a:p>
@@ -38256,7 +38934,7 @@
                 <a:ea typeface="Trebuchet MS" pitchFamily="34" charset="-122"/>
                 <a:cs typeface="Trebuchet MS" pitchFamily="34" charset="-120"/>
               </a:rPr>
-              <a:t>atypicalness</a:t>
+              <a:t>typicalness</a:t>
             </a:r>
             <a:endParaRPr lang="en-US" sz="1200" dirty="0"/>
           </a:p>
@@ -39444,7 +40122,7 @@
                 <a:ea typeface="Calibri" pitchFamily="34" charset="-122"/>
                 <a:cs typeface="Calibri" pitchFamily="34" charset="-120"/>
               </a:rPr>
-              <a:t>1.  The root 'typical' comes from the Greek word 'typos', meaning a pattern or type.</a:t>
+              <a:t>1.  The word 'atypical' means something is unusual or different from normal.</a:t>
             </a:r>
             <a:endParaRPr lang="en-US" sz="1300" dirty="0"/>
           </a:p>
@@ -39583,7 +40261,7 @@
                 <a:ea typeface="Calibri" pitchFamily="34" charset="-122"/>
                 <a:cs typeface="Calibri" pitchFamily="34" charset="-120"/>
               </a:rPr>
-              <a:t>2.  The prefix 'a-' in 'atypical' means 'very much' or 'a lot'.</a:t>
+              <a:t>2.  The root 'typical' comes from Latin and means to write.</a:t>
             </a:r>
             <a:endParaRPr lang="en-US" sz="1300" dirty="0"/>
           </a:p>
@@ -39722,7 +40400,7 @@
                 <a:ea typeface="Calibri" pitchFamily="34" charset="-122"/>
                 <a:cs typeface="Calibri" pitchFamily="34" charset="-120"/>
               </a:rPr>
-              <a:t>3.  Adding '-ly' to 'typical' makes it an adverb meaning 'in a normal way'.</a:t>
+              <a:t>3.  The prefix 'a-' in 'atypical' means 'not' or 'without'.</a:t>
             </a:r>
             <a:endParaRPr lang="en-US" sz="1300" dirty="0"/>
           </a:p>
@@ -39861,7 +40539,7 @@
                 <a:ea typeface="Calibri" pitchFamily="34" charset="-122"/>
                 <a:cs typeface="Calibri" pitchFamily="34" charset="-120"/>
               </a:rPr>
-              <a:t>4.  The word 'atypical' means something is unusual or not what you would expect.</a:t>
+              <a:t>4.  The word 'typically' is a noun because it names a thing.</a:t>
             </a:r>
             <a:endParaRPr lang="en-US" sz="1300" dirty="0"/>
           </a:p>
@@ -39884,11 +40562,11 @@
             </a:avLst>
           </a:prstGeom>
           <a:solidFill>
-            <a:srgbClr val="DCFCE7"/>
-          </a:solidFill>
-          <a:ln w="12700">
-            <a:solidFill>
-              <a:srgbClr val="16A34A"/>
+            <a:srgbClr val="FEE2E2"/>
+          </a:solidFill>
+          <a:ln w="12700">
+            <a:solidFill>
+              <a:srgbClr val="DC2626"/>
             </a:solidFill>
             <a:prstDash val="solid"/>
           </a:ln>
@@ -39921,13 +40599,13 @@
             <a:r>
               <a:rPr lang="en-US" sz="1100" b="1" dirty="0">
                 <a:solidFill>
-                  <a:srgbClr val="16A34A"/>
+                  <a:srgbClr val="DC2626"/>
                 </a:solidFill>
                 <a:latin typeface="Trebuchet MS" pitchFamily="34" charset="0"/>
                 <a:ea typeface="Trebuchet MS" pitchFamily="34" charset="-122"/>
                 <a:cs typeface="Trebuchet MS" pitchFamily="34" charset="-120"/>
               </a:rPr>
-              <a:t>TRUE</a:t>
+              <a:t>FALSE</a:t>
             </a:r>
             <a:endParaRPr lang="en-US" sz="1100" dirty="0"/>
           </a:p>
@@ -40000,7 +40678,7 @@
                 <a:ea typeface="Calibri" pitchFamily="34" charset="-122"/>
                 <a:cs typeface="Calibri" pitchFamily="34" charset="-120"/>
               </a:rPr>
-              <a:t>5.  The word 'typically' is a noun describing a type of person.</a:t>
+              <a:t>5.  Adding the suffix '-ly' to 'typical' makes the word 'typically', which is an adverb.</a:t>
             </a:r>
             <a:endParaRPr lang="en-US" sz="1300" dirty="0"/>
           </a:p>
@@ -40023,11 +40701,11 @@
             </a:avLst>
           </a:prstGeom>
           <a:solidFill>
-            <a:srgbClr val="FEE2E2"/>
-          </a:solidFill>
-          <a:ln w="12700">
-            <a:solidFill>
-              <a:srgbClr val="DC2626"/>
+            <a:srgbClr val="DCFCE7"/>
+          </a:solidFill>
+          <a:ln w="12700">
+            <a:solidFill>
+              <a:srgbClr val="16A34A"/>
             </a:solidFill>
             <a:prstDash val="solid"/>
           </a:ln>
@@ -40060,13 +40738,13 @@
             <a:r>
               <a:rPr lang="en-US" sz="1100" b="1" dirty="0">
                 <a:solidFill>
-                  <a:srgbClr val="DC2626"/>
+                  <a:srgbClr val="16A34A"/>
                 </a:solidFill>
                 <a:latin typeface="Trebuchet MS" pitchFamily="34" charset="0"/>
                 <a:ea typeface="Trebuchet MS" pitchFamily="34" charset="-122"/>
                 <a:cs typeface="Trebuchet MS" pitchFamily="34" charset="-120"/>
               </a:rPr>
-              <a:t>FALSE</a:t>
+              <a:t>TRUE</a:t>
             </a:r>
             <a:endParaRPr lang="en-US" sz="1100" dirty="0"/>
           </a:p>
@@ -40534,7 +41212,7 @@
                 <a:ea typeface="Calibri" pitchFamily="34" charset="-122"/>
                 <a:cs typeface="Calibri" pitchFamily="34" charset="-120"/>
               </a:rPr>
-              <a:t>Origin: Greek: typos</a:t>
+              <a:t>Origin: Greek: typikos</a:t>
             </a:r>
             <a:endParaRPr lang="en-US" sz="1100" dirty="0"/>
           </a:p>
@@ -40705,7 +41383,7 @@
                 <a:ea typeface="Trebuchet MS" pitchFamily="34" charset="-122"/>
                 <a:cs typeface="Trebuchet MS" pitchFamily="34" charset="-120"/>
               </a:rPr>
-              <a:t>atypical</a:t>
+              <a:t>typically</a:t>
             </a:r>
             <a:endParaRPr lang="en-US" sz="1300" dirty="0"/>
           </a:p>
@@ -40771,7 +41449,7 @@
                 <a:ea typeface="Trebuchet MS" pitchFamily="34" charset="-122"/>
                 <a:cs typeface="Trebuchet MS" pitchFamily="34" charset="-120"/>
               </a:rPr>
-              <a:t>typically</a:t>
+              <a:t>atypical</a:t>
             </a:r>
             <a:endParaRPr lang="en-US" sz="1300" dirty="0"/>
           </a:p>
@@ -40837,7 +41515,7 @@
                 <a:ea typeface="Trebuchet MS" pitchFamily="34" charset="-122"/>
                 <a:cs typeface="Trebuchet MS" pitchFamily="34" charset="-120"/>
               </a:rPr>
-              <a:t>untypically</a:t>
+              <a:t>untypical</a:t>
             </a:r>
             <a:endParaRPr lang="en-US" sz="1300" dirty="0"/>
           </a:p>
@@ -40969,7 +41647,7 @@
                 <a:ea typeface="Trebuchet MS" pitchFamily="34" charset="-122"/>
                 <a:cs typeface="Trebuchet MS" pitchFamily="34" charset="-120"/>
               </a:rPr>
-              <a:t>typicalness</a:t>
+              <a:t>atypically</a:t>
             </a:r>
             <a:endParaRPr lang="en-US" sz="1300" dirty="0"/>
           </a:p>
@@ -41035,7 +41713,7 @@
                 <a:ea typeface="Trebuchet MS" pitchFamily="34" charset="-122"/>
                 <a:cs typeface="Trebuchet MS" pitchFamily="34" charset="-120"/>
               </a:rPr>
-              <a:t>atypically</a:t>
+              <a:t>untypically</a:t>
             </a:r>
             <a:endParaRPr lang="en-US" sz="1300" dirty="0"/>
           </a:p>
@@ -42062,7 +42740,7 @@
                 <a:ea typeface="Trebuchet MS" pitchFamily="34" charset="-122"/>
                 <a:cs typeface="Trebuchet MS" pitchFamily="34" charset="-120"/>
               </a:rPr>
-              <a:t>-ness</a:t>
+              <a:t>-al</a:t>
             </a:r>
             <a:endParaRPr lang="en-US" sz="1300" dirty="0"/>
           </a:p>
@@ -42215,7 +42893,7 @@
                 <a:ea typeface="Trebuchet MS" pitchFamily="34" charset="-122"/>
                 <a:cs typeface="Trebuchet MS" pitchFamily="34" charset="-120"/>
               </a:rPr>
-              <a:t>-al</a:t>
+              <a:t>-ness</a:t>
             </a:r>
             <a:endParaRPr lang="en-US" sz="1300" dirty="0"/>
           </a:p>
@@ -42368,7 +43046,7 @@
                 <a:ea typeface="Trebuchet MS" pitchFamily="34" charset="-122"/>
                 <a:cs typeface="Trebuchet MS" pitchFamily="34" charset="-120"/>
               </a:rPr>
-              <a:t>-ise</a:t>
+              <a:t>-ally</a:t>
             </a:r>
             <a:endParaRPr lang="en-US" sz="1300" dirty="0"/>
           </a:p>
@@ -43279,7 +43957,7 @@
                 <a:ea typeface="Calibri" pitchFamily="34" charset="-122"/>
                 <a:cs typeface="Calibri" pitchFamily="34" charset="-120"/>
               </a:rPr>
-              <a:t>Something that is a normal, expected example of its kind.</a:t>
+              <a:t>Something that is normal or what you would expect, like a typical school day with lessons and lunch.</a:t>
             </a:r>
             <a:endParaRPr lang="en-US" sz="1200" dirty="0"/>
           </a:p>
@@ -43352,7 +44030,7 @@
                 <a:ea typeface="Trebuchet MS" pitchFamily="34" charset="-122"/>
                 <a:cs typeface="Trebuchet MS" pitchFamily="34" charset="-120"/>
               </a:rPr>
-              <a:t>atypical</a:t>
+              <a:t>typically</a:t>
             </a:r>
             <a:endParaRPr lang="en-US" sz="1200" dirty="0"/>
           </a:p>
@@ -43418,7 +44096,7 @@
                 <a:ea typeface="Calibri" pitchFamily="34" charset="-122"/>
                 <a:cs typeface="Calibri" pitchFamily="34" charset="-120"/>
               </a:rPr>
-              <a:t>In the way that usually happens; normally.</a:t>
+              <a:t>Something that is unusual or different from what is expected, like atypical weather in summer.</a:t>
             </a:r>
             <a:endParaRPr lang="en-US" sz="1200" dirty="0"/>
           </a:p>
@@ -43491,7 +44169,7 @@
                 <a:ea typeface="Trebuchet MS" pitchFamily="34" charset="-122"/>
                 <a:cs typeface="Trebuchet MS" pitchFamily="34" charset="-120"/>
               </a:rPr>
-              <a:t>typically</a:t>
+              <a:t>atypical</a:t>
             </a:r>
             <a:endParaRPr lang="en-US" sz="1200" dirty="0"/>
           </a:p>
@@ -43557,7 +44235,7 @@
                 <a:ea typeface="Calibri" pitchFamily="34" charset="-122"/>
                 <a:cs typeface="Calibri" pitchFamily="34" charset="-120"/>
               </a:rPr>
-              <a:t>The state of being ordinary or as expected.</a:t>
+              <a:t>In a way that is unusual or different from what is normal, like acting atypically calm during a storm.</a:t>
             </a:r>
             <a:endParaRPr lang="en-US" sz="1200" dirty="0"/>
           </a:p>
@@ -43630,7 +44308,7 @@
                 <a:ea typeface="Trebuchet MS" pitchFamily="34" charset="-122"/>
                 <a:cs typeface="Trebuchet MS" pitchFamily="34" charset="-120"/>
               </a:rPr>
-              <a:t>untypically</a:t>
+              <a:t>untypical</a:t>
             </a:r>
             <a:endParaRPr lang="en-US" sz="1200" dirty="0"/>
           </a:p>
@@ -43696,7 +44374,7 @@
                 <a:ea typeface="Calibri" pitchFamily="34" charset="-122"/>
                 <a:cs typeface="Calibri" pitchFamily="34" charset="-120"/>
               </a:rPr>
-              <a:t>In a way that is not normal or expected.</a:t>
+              <a:t>Not like the usual or normal version of something, like untypical behaviour from your pet.</a:t>
             </a:r>
             <a:endParaRPr lang="en-US" sz="1200" dirty="0"/>
           </a:p>
@@ -43835,7 +44513,7 @@
                 <a:ea typeface="Calibri" pitchFamily="34" charset="-122"/>
                 <a:cs typeface="Calibri" pitchFamily="34" charset="-120"/>
               </a:rPr>
-              <a:t>The quality of being a good, normal example of something.</a:t>
+              <a:t>How normal or usual something is compared to others of the same kind.</a:t>
             </a:r>
             <a:endParaRPr lang="en-US" sz="1200" dirty="0"/>
           </a:p>
@@ -43908,7 +44586,7 @@
                 <a:ea typeface="Trebuchet MS" pitchFamily="34" charset="-122"/>
                 <a:cs typeface="Trebuchet MS" pitchFamily="34" charset="-120"/>
               </a:rPr>
-              <a:t>typicalness</a:t>
+              <a:t>atypically</a:t>
             </a:r>
             <a:endParaRPr lang="en-US" sz="1200" dirty="0"/>
           </a:p>
@@ -43974,7 +44652,7 @@
                 <a:ea typeface="Calibri" pitchFamily="34" charset="-122"/>
                 <a:cs typeface="Calibri" pitchFamily="34" charset="-120"/>
               </a:rPr>
-              <a:t>In a way that is unusual or not what you would expect.</a:t>
+              <a:t>In a way that is not normal or expected, like untypically finishing all your vegetables.</a:t>
             </a:r>
             <a:endParaRPr lang="en-US" sz="1200" dirty="0"/>
           </a:p>
@@ -44047,7 +44725,7 @@
                 <a:ea typeface="Trebuchet MS" pitchFamily="34" charset="-122"/>
                 <a:cs typeface="Trebuchet MS" pitchFamily="34" charset="-120"/>
               </a:rPr>
-              <a:t>atypically</a:t>
+              <a:t>untypically</a:t>
             </a:r>
             <a:endParaRPr lang="en-US" sz="1200" dirty="0"/>
           </a:p>
@@ -44113,7 +44791,7 @@
                 <a:ea typeface="Calibri" pitchFamily="34" charset="-122"/>
                 <a:cs typeface="Calibri" pitchFamily="34" charset="-120"/>
               </a:rPr>
-              <a:t>Something that is unusual or different from what is normal.</a:t>
+              <a:t>The way something usually happens, like how it typically rains in winter.</a:t>
             </a:r>
             <a:endParaRPr lang="en-US" sz="1200" dirty="0"/>
           </a:p>
@@ -44608,7 +45286,7 @@
                 <a:ea typeface="Calibri" pitchFamily="34" charset="-122"/>
                 <a:cs typeface="Calibri" pitchFamily="34" charset="-120"/>
               </a:rPr>
-              <a:t>A typical school day for Mia begins with reading, then maths, and ends with sport in the afternoon.</a:t>
+              <a:t>A typical Australian summer is hot and sunny, but this year the weather has been atypical with lots of rain.</a:t>
             </a:r>
             <a:endParaRPr lang="en-US" sz="1500" dirty="0"/>
           </a:p>
@@ -44772,7 +45450,7 @@
                 <a:ea typeface="Calibri" pitchFamily="34" charset="-122"/>
                 <a:cs typeface="Calibri" pitchFamily="34" charset="-120"/>
               </a:rPr>
-              <a:t>It was atypical for it to snow in Sydney, so the children were very excited when they saw the frost.</a:t>
+              <a:t>Sam typically finishes his homework before dinner, so his mum was surprised when he forgot tonight.</a:t>
             </a:r>
             <a:endParaRPr lang="en-US" sz="1500" dirty="0"/>
           </a:p>
@@ -44936,7 +45614,7 @@
                 <a:ea typeface="Calibri" pitchFamily="34" charset="-122"/>
                 <a:cs typeface="Calibri" pitchFamily="34" charset="-120"/>
               </a:rPr>
-              <a:t>Typically, the library is quiet, but today everyone was buzzing with excitement about the book fair.</a:t>
+              <a:t>The scientist said the results were atypical because they were completely different from what the team had expected.</a:t>
             </a:r>
             <a:endParaRPr lang="en-US" sz="1500" dirty="0"/>
           </a:p>
